--- a/1 Year 12 Weekly/Week 08 (02 Nov) 1.2.3 Methodologies + 2.1.3/1 Lesson 1.2.3.pptx
+++ b/1 Year 12 Weekly/Week 08 (02 Nov) 1.2.3 Methodologies + 2.1.3/1 Lesson 1.2.3.pptx
@@ -18,6 +18,23 @@
     <p:sldId id="266" r:id="rId17"/>
     <p:sldId id="267" r:id="rId18"/>
     <p:sldId id="268" r:id="rId19"/>
+    <p:sldId id="269" r:id="rId20"/>
+    <p:sldId id="270" r:id="rId21"/>
+    <p:sldId id="271" r:id="rId22"/>
+    <p:sldId id="272" r:id="rId23"/>
+    <p:sldId id="273" r:id="rId24"/>
+    <p:sldId id="274" r:id="rId25"/>
+    <p:sldId id="275" r:id="rId26"/>
+    <p:sldId id="276" r:id="rId27"/>
+    <p:sldId id="277" r:id="rId28"/>
+    <p:sldId id="278" r:id="rId29"/>
+    <p:sldId id="279" r:id="rId30"/>
+    <p:sldId id="280" r:id="rId31"/>
+    <p:sldId id="281" r:id="rId32"/>
+    <p:sldId id="282" r:id="rId33"/>
+    <p:sldId id="283" r:id="rId34"/>
+    <p:sldId id="284" r:id="rId35"/>
+    <p:sldId id="285" r:id="rId36"/>
   </p:sldIdLst>
   <p:sldSz cx="12191695" cy="6858000" type="screen4x3"/>
   <p:notesSz cx="6858000" cy="9144000"/>
@@ -3182,7 +3199,7 @@
                 </a:solidFill>
                 <a:latin typeface="Calibri"/>
               </a:rPr>
-              <a:t>Lesson deck — editable skeleton: adapt freely.</a:t>
+              <a:t>Week 08 (02 Nov)</a:t>
             </a:r>
           </a:p>
         </p:txBody>
@@ -3242,7 +3259,7 @@
                 </a:solidFill>
                 <a:latin typeface="Calibri"/>
               </a:rPr>
-              <a:t>Worked example</a:t>
+              <a:t>Spiral</a:t>
             </a:r>
           </a:p>
         </p:txBody>
@@ -3271,29 +3288,17 @@
           <a:p>
             <a:pPr/>
             <a:r>
-              <a:rPr sz="2200" b="1">
-                <a:solidFill>
-                  <a:srgbClr val="2B6CB0"/>
-                </a:solidFill>
-                <a:latin typeface="Calibri"/>
-              </a:rPr>
-              <a:t>Choosing a methodology for a high-risk banking system</a:t>
-            </a:r>
-          </a:p>
-          <a:p>
-            <a:pPr lvl="1"/>
-            <a:r>
               <a:rPr sz="2000" b="0">
                 <a:solidFill>
                   <a:srgbClr val="222222"/>
                 </a:solidFill>
                 <a:latin typeface="Calibri"/>
               </a:rPr>
-              <a:t>1. Read the scenario clues: large budget, high cost of failure, security-critical and long-lived.</a:t>
-            </a:r>
-          </a:p>
-          <a:p>
-            <a:pPr lvl="1"/>
+              <a:t>Iterative loops, each passing through objectives, risk analysis, development and planning quadrants.</a:t>
+            </a:r>
+          </a:p>
+          <a:p>
+            <a:pPr/>
             <a:r>
               <a:rPr sz="2000" b="0">
                 <a:solidFill>
@@ -3301,11 +3306,11 @@
                 </a:solidFill>
                 <a:latin typeface="Calibri"/>
               </a:rPr>
-              <a:t>2. Note that requirements are fairly known but the risk of expensive errors is the dominant concern.</a:t>
-            </a:r>
-          </a:p>
-          <a:p>
-            <a:pPr lvl="1"/>
+              <a:t>Risk analysis at the start of every loop identifies and mitigates the biggest hazards first.</a:t>
+            </a:r>
+          </a:p>
+          <a:p>
+            <a:pPr/>
             <a:r>
               <a:rPr sz="2000" b="0">
                 <a:solidFill>
@@ -3313,11 +3318,11 @@
                 </a:solidFill>
                 <a:latin typeface="Calibri"/>
               </a:rPr>
-              <a:t>3. Rule out Waterfall (no risk handling mid-project) and RAD (speed over robustness).</a:t>
-            </a:r>
-          </a:p>
-          <a:p>
-            <a:pPr lvl="1"/>
+              <a:t>Merit: costly problems are caught early on large, high-risk projects.</a:t>
+            </a:r>
+          </a:p>
+          <a:p>
+            <a:pPr/>
             <a:r>
               <a:rPr sz="2000" b="0">
                 <a:solidFill>
@@ -3325,11 +3330,11 @@
                 </a:solidFill>
                 <a:latin typeface="Calibri"/>
               </a:rPr>
-              <a:t>4. Select Spiral because each loop performs explicit risk analysis before continuing.</a:t>
-            </a:r>
-          </a:p>
-          <a:p>
-            <a:pPr lvl="1"/>
+              <a:t>Drawbacks: expensive, complex to manage, and needs skilled risk assessors.</a:t>
+            </a:r>
+          </a:p>
+          <a:p>
+            <a:pPr/>
             <a:r>
               <a:rPr sz="2000" b="0">
                 <a:solidFill>
@@ -3337,19 +3342,7 @@
                 </a:solidFill>
                 <a:latin typeface="Calibri"/>
               </a:rPr>
-              <a:t>5. Justify: catching costly problems early on a high-cost project reduces the chance of expensive failure later.</a:t>
-            </a:r>
-          </a:p>
-          <a:p>
-            <a:pPr lvl="1"/>
-            <a:r>
-              <a:rPr sz="2000" b="0">
-                <a:solidFill>
-                  <a:srgbClr val="222222"/>
-                </a:solidFill>
-                <a:latin typeface="Calibri"/>
-              </a:rPr>
-              <a:t>6. Acknowledge the trade-off: Spiral is itself expensive and complex to manage, which the large budget can absorb.</a:t>
+              <a:t>Best for large, expensive projects where failure would be catastrophic.</a:t>
             </a:r>
           </a:p>
         </p:txBody>
@@ -3409,7 +3402,7 @@
                 </a:solidFill>
                 <a:latin typeface="Calibri"/>
               </a:rPr>
-              <a:t>Your turn</a:t>
+              <a:t>RAD</a:t>
             </a:r>
           </a:p>
         </p:txBody>
@@ -3438,48 +3431,61 @@
           <a:p>
             <a:pPr/>
             <a:r>
-              <a:rPr sz="2400" b="1">
-                <a:solidFill>
-                  <a:srgbClr val="2B6CB0"/>
-                </a:solidFill>
-                <a:latin typeface="Calibri"/>
-              </a:rPr>
-              <a:t>Task</a:t>
-            </a:r>
-          </a:p>
-          <a:p>
-            <a:pPr lvl="1"/>
-            <a:r>
-              <a:rPr sz="2200" b="0">
-                <a:solidFill>
-                  <a:srgbClr val="222222"/>
-                </a:solidFill>
-                <a:latin typeface="Calibri"/>
-              </a:rPr>
-              <a:t>Create a one-page revision table listing the five methodologies, one scenario each suits, and one strength and one weakness of each.</a:t>
-            </a:r>
-          </a:p>
-          <a:p>
-            <a:r>
-              <a:rPr sz="2400" b="1">
-                <a:solidFill>
-                  <a:srgbClr val="B76E00"/>
-                </a:solidFill>
-                <a:latin typeface="Calibri"/>
-              </a:rPr>
-              <a:t>Challenge / stretch</a:t>
-            </a:r>
-          </a:p>
-          <a:p>
-            <a:pPr lvl="1"/>
-            <a:r>
-              <a:rPr sz="2200" b="0">
-                <a:solidFill>
-                  <a:srgbClr val="222222"/>
-                </a:solidFill>
-                <a:latin typeface="Calibri"/>
-              </a:rPr>
-              <a:t>A startup is building a brand-new mobile app: requirements are unclear and expected to change, the budget is modest and the team is small but skilled. Recommend a methodology and justify it with at least three explicit links to these scenario clues, explaining why Waterfall would be unsuitable.</a:t>
+              <a:rPr sz="2000" b="0">
+                <a:solidFill>
+                  <a:srgbClr val="222222"/>
+                </a:solidFill>
+                <a:latin typeface="Calibri"/>
+              </a:rPr>
+              <a:t>Rapid application development builds a partial prototype quickly from initial requirements.</a:t>
+            </a:r>
+          </a:p>
+          <a:p>
+            <a:pPr/>
+            <a:r>
+              <a:rPr sz="2000" b="0">
+                <a:solidFill>
+                  <a:srgbClr val="222222"/>
+                </a:solidFill>
+                <a:latin typeface="Calibri"/>
+              </a:rPr>
+              <a:t>Users trial each prototype and their feedback drives the next refinement until it becomes the product.</a:t>
+            </a:r>
+          </a:p>
+          <a:p>
+            <a:pPr/>
+            <a:r>
+              <a:rPr sz="2000" b="0">
+                <a:solidFill>
+                  <a:srgbClr val="222222"/>
+                </a:solidFill>
+                <a:latin typeface="Calibri"/>
+              </a:rPr>
+              <a:t>Merits: very fast delivery; works even when users cannot state requirements up front.</a:t>
+            </a:r>
+          </a:p>
+          <a:p>
+            <a:pPr/>
+            <a:r>
+              <a:rPr sz="2000" b="0">
+                <a:solidFill>
+                  <a:srgbClr val="222222"/>
+                </a:solidFill>
+                <a:latin typeface="Calibri"/>
+              </a:rPr>
+              <a:t>Drawbacks: needs skilled developers and committed users; the result can be less robust and efficient.</a:t>
+            </a:r>
+          </a:p>
+          <a:p>
+            <a:pPr/>
+            <a:r>
+              <a:rPr sz="2000" b="0">
+                <a:solidFill>
+                  <a:srgbClr val="222222"/>
+                </a:solidFill>
+                <a:latin typeface="Calibri"/>
+              </a:rPr>
+              <a:t>Best when the deadline is tight or requirements are vague.</a:t>
             </a:r>
           </a:p>
         </p:txBody>
@@ -3539,7 +3545,7 @@
                 </a:solidFill>
                 <a:latin typeface="Calibri"/>
               </a:rPr>
-              <a:t>Exit ticket</a:t>
+              <a:t>Choosing a methodology for a scenario</a:t>
             </a:r>
           </a:p>
         </p:txBody>
@@ -3566,36 +3572,75 @@
           </a:bodyPr>
           <a:lstStyle/>
           <a:p>
-            <a:r>
-              <a:rPr sz="2200" b="1">
-                <a:solidFill>
-                  <a:srgbClr val="222222"/>
-                </a:solidFill>
-                <a:latin typeface="Calibri"/>
-              </a:rPr>
-              <a:t>1. Name the three categories of test data with a one-line description of each.</a:t>
-            </a:r>
-          </a:p>
-          <a:p>
-            <a:r>
-              <a:rPr sz="2200" b="1">
-                <a:solidFill>
-                  <a:srgbClr val="222222"/>
-                </a:solidFill>
-                <a:latin typeface="Calibri"/>
-              </a:rPr>
-              <a:t>2. Give one advantage and one disadvantage of Waterfall.</a:t>
-            </a:r>
-          </a:p>
-          <a:p>
-            <a:r>
-              <a:rPr sz="2200" b="1">
-                <a:solidFill>
-                  <a:srgbClr val="222222"/>
-                </a:solidFill>
-                <a:latin typeface="Calibri"/>
-              </a:rPr>
-              <a:t>3. Why is Agile often better than Waterfall when requirements are unclear or likely to change?</a:t>
+            <a:pPr/>
+            <a:r>
+              <a:rPr sz="2000" b="0">
+                <a:solidFill>
+                  <a:srgbClr val="222222"/>
+                </a:solidFill>
+                <a:latin typeface="Calibri"/>
+              </a:rPr>
+              <a:t>Read the scenario for clues: clarity of requirements, budget, deadline, risk, team size.</a:t>
+            </a:r>
+          </a:p>
+          <a:p>
+            <a:pPr/>
+            <a:r>
+              <a:rPr sz="2000" b="0">
+                <a:solidFill>
+                  <a:srgbClr val="222222"/>
+                </a:solidFill>
+                <a:latin typeface="Calibri"/>
+              </a:rPr>
+              <a:t>Fixed, documented, contractual requirements point to Waterfall.</a:t>
+            </a:r>
+          </a:p>
+          <a:p>
+            <a:pPr/>
+            <a:r>
+              <a:rPr sz="2000" b="0">
+                <a:solidFill>
+                  <a:srgbClr val="222222"/>
+                </a:solidFill>
+                <a:latin typeface="Calibri"/>
+              </a:rPr>
+              <a:t>Vague or volatile requirements point to Agile or RAD; tight deadlines strengthen RAD.</a:t>
+            </a:r>
+          </a:p>
+          <a:p>
+            <a:pPr/>
+            <a:r>
+              <a:rPr sz="2000" b="0">
+                <a:solidFill>
+                  <a:srgbClr val="222222"/>
+                </a:solidFill>
+                <a:latin typeface="Calibri"/>
+              </a:rPr>
+              <a:t>Large budget with a high cost of failure points to Spiral.</a:t>
+            </a:r>
+          </a:p>
+          <a:p>
+            <a:pPr/>
+            <a:r>
+              <a:rPr sz="2000" b="0">
+                <a:solidFill>
+                  <a:srgbClr val="222222"/>
+                </a:solidFill>
+                <a:latin typeface="Calibri"/>
+              </a:rPr>
+              <a:t>Marks come from linking each clue to a feature of the chosen methodology, not from description.</a:t>
+            </a:r>
+          </a:p>
+          <a:p>
+            <a:pPr/>
+            <a:r>
+              <a:rPr sz="1800" b="1">
+                <a:solidFill>
+                  <a:srgbClr val="B76E00"/>
+                </a:solidFill>
+                <a:latin typeface="Calibri"/>
+              </a:rPr>
+              <a:t>AO3 questions expect a justified choice plus an acknowledged trade-off of that choice.</a:t>
             </a:r>
           </a:p>
         </p:txBody>
@@ -3655,7 +3700,7 @@
                 </a:solidFill>
                 <a:latin typeface="Calibri"/>
               </a:rPr>
-              <a:t>Exit ticket — answers</a:t>
+              <a:t>Writing and following algorithms</a:t>
             </a:r>
           </a:p>
         </p:txBody>
@@ -3682,72 +3727,1089 @@
           </a:bodyPr>
           <a:lstStyle/>
           <a:p>
+            <a:pPr/>
+            <a:r>
+              <a:rPr sz="2000" b="0">
+                <a:solidFill>
+                  <a:srgbClr val="222222"/>
+                </a:solidFill>
+                <a:latin typeface="Calibri"/>
+              </a:rPr>
+              <a:t>An algorithm is a precise, ordered, finite set of steps that solves a problem.</a:t>
+            </a:r>
+          </a:p>
+          <a:p>
+            <a:pPr/>
+            <a:r>
+              <a:rPr sz="2000" b="0">
+                <a:solidFill>
+                  <a:srgbClr val="222222"/>
+                </a:solidFill>
+                <a:latin typeface="Calibri"/>
+              </a:rPr>
+              <a:t>Writing one means stating unambiguous steps in sequence with clear inputs and outputs.</a:t>
+            </a:r>
+          </a:p>
+          <a:p>
+            <a:pPr/>
+            <a:r>
+              <a:rPr sz="2000" b="0">
+                <a:solidFill>
+                  <a:srgbClr val="222222"/>
+                </a:solidFill>
+                <a:latin typeface="Calibri"/>
+              </a:rPr>
+              <a:t>Following one means tracing it exactly as written, recording every variable change in a trace table.</a:t>
+            </a:r>
+          </a:p>
+          <a:p>
+            <a:pPr/>
+            <a:r>
+              <a:rPr sz="2000" b="0">
+                <a:solidFill>
+                  <a:srgbClr val="222222"/>
+                </a:solidFill>
+                <a:latin typeface="Calibri"/>
+              </a:rPr>
+              <a:t>Trace tables expose logic errors before any code is written.</a:t>
+            </a:r>
+          </a:p>
+          <a:p>
+            <a:pPr lvl="1"/>
+            <a:r>
+              <a:rPr sz="1600" b="0">
+                <a:solidFill>
+                  <a:srgbClr val="1A365D"/>
+                </a:solidFill>
+                <a:latin typeface="Consolas"/>
+              </a:rPr>
+              <a:t>total = 0</a:t>
+            </a:r>
+          </a:p>
+          <a:p>
+            <a:pPr lvl="1"/>
+            <a:r>
+              <a:rPr sz="1600" b="0">
+                <a:solidFill>
+                  <a:srgbClr val="1A365D"/>
+                </a:solidFill>
+                <a:latin typeface="Consolas"/>
+              </a:rPr>
+              <a:t>for i = 1 to 4</a:t>
+            </a:r>
+          </a:p>
+          <a:p>
+            <a:pPr lvl="1"/>
+            <a:r>
+              <a:rPr sz="1600" b="0">
+                <a:solidFill>
+                  <a:srgbClr val="1A365D"/>
+                </a:solidFill>
+                <a:latin typeface="Consolas"/>
+              </a:rPr>
+              <a:t>   num = input("Enter a number")</a:t>
+            </a:r>
+          </a:p>
+          <a:p>
+            <a:pPr lvl="1"/>
+            <a:r>
+              <a:rPr sz="1600" b="0">
+                <a:solidFill>
+                  <a:srgbClr val="1A365D"/>
+                </a:solidFill>
+                <a:latin typeface="Consolas"/>
+              </a:rPr>
+              <a:t>   total = total + num</a:t>
+            </a:r>
+          </a:p>
+          <a:p>
+            <a:pPr lvl="1"/>
+            <a:r>
+              <a:rPr sz="1600" b="0">
+                <a:solidFill>
+                  <a:srgbClr val="1A365D"/>
+                </a:solidFill>
+                <a:latin typeface="Consolas"/>
+              </a:rPr>
+              <a:t>next i</a:t>
+            </a:r>
+          </a:p>
+          <a:p>
+            <a:pPr lvl="1"/>
+            <a:r>
+              <a:rPr sz="1600" b="0">
+                <a:solidFill>
+                  <a:srgbClr val="1A365D"/>
+                </a:solidFill>
+                <a:latin typeface="Consolas"/>
+              </a:rPr>
+              <a:t>print(total / 4)</a:t>
+            </a:r>
+          </a:p>
+        </p:txBody>
+      </p:sp>
+    </p:spTree>
+  </p:cSld>
+  <p:clrMapOvr>
+    <a:masterClrMapping/>
+  </p:clrMapOvr>
+</p:sld>
+</file>
+
+<file path=ppt/slides/slide14.xml><?xml version="1.0" encoding="utf-8"?>
+<p:sld xmlns:a="http://schemas.openxmlformats.org/drawingml/2006/main" xmlns:p="http://schemas.openxmlformats.org/presentationml/2006/main" xmlns:r="http://schemas.openxmlformats.org/officeDocument/2006/relationships">
+  <p:cSld>
+    <p:bg>
+      <p:bgPr>
+        <a:solidFill>
+          <a:srgbClr val="FFFFFF"/>
+        </a:solidFill>
+        <a:effectLst/>
+      </p:bgPr>
+    </p:bg>
+    <p:spTree>
+      <p:nvGrpSpPr>
+        <p:cNvPr id="1" name=""/>
+        <p:cNvGrpSpPr/>
+        <p:nvPr/>
+      </p:nvGrpSpPr>
+      <p:grpSpPr/>
+      <p:sp>
+        <p:nvSpPr>
+          <p:cNvPr id="2" name="TextBox 1"/>
+          <p:cNvSpPr txBox="1"/>
+          <p:nvPr/>
+        </p:nvSpPr>
+        <p:spPr>
+          <a:xfrm>
+            <a:off x="548640" y="274320"/>
+            <a:ext cx="11064240" cy="822960"/>
+          </a:xfrm>
+          <a:prstGeom prst="rect">
+            <a:avLst/>
+          </a:prstGeom>
+          <a:noFill/>
+        </p:spPr>
+        <p:txBody>
+          <a:bodyPr wrap="square">
+            <a:spAutoFit/>
+          </a:bodyPr>
+          <a:lstStyle/>
+          <a:p>
+            <a:r>
+              <a:rPr sz="3000" b="1" i="0">
+                <a:solidFill>
+                  <a:srgbClr val="2B6CB0"/>
+                </a:solidFill>
+                <a:latin typeface="Calibri"/>
+              </a:rPr>
+              <a:t>Test data: normal, boundary, erroneous</a:t>
+            </a:r>
+          </a:p>
+        </p:txBody>
+      </p:sp>
+      <p:sp>
+        <p:nvSpPr>
+          <p:cNvPr id="3" name="TextBox 2"/>
+          <p:cNvSpPr txBox="1"/>
+          <p:nvPr/>
+        </p:nvSpPr>
+        <p:spPr>
+          <a:xfrm>
+            <a:off x="640080" y="1280160"/>
+            <a:ext cx="10881360" cy="5120640"/>
+          </a:xfrm>
+          <a:prstGeom prst="rect">
+            <a:avLst/>
+          </a:prstGeom>
+          <a:noFill/>
+        </p:spPr>
+        <p:txBody>
+          <a:bodyPr wrap="square">
+            <a:spAutoFit/>
+          </a:bodyPr>
+          <a:lstStyle/>
+          <a:p>
+            <a:pPr/>
+            <a:r>
+              <a:rPr sz="2000" b="0">
+                <a:solidFill>
+                  <a:srgbClr val="222222"/>
+                </a:solidFill>
+                <a:latin typeface="Calibri"/>
+              </a:rPr>
+              <a:t>Normal (valid) data: typical in-range values the program should accept.</a:t>
+            </a:r>
+          </a:p>
+          <a:p>
+            <a:pPr/>
+            <a:r>
+              <a:rPr sz="2000" b="0">
+                <a:solidFill>
+                  <a:srgbClr val="222222"/>
+                </a:solidFill>
+                <a:latin typeface="Calibri"/>
+              </a:rPr>
+              <a:t>Boundary data: values at the exact edges of the range, still valid and accepted.</a:t>
+            </a:r>
+          </a:p>
+          <a:p>
+            <a:pPr/>
+            <a:r>
+              <a:rPr sz="2000" b="0">
+                <a:solidFill>
+                  <a:srgbClr val="222222"/>
+                </a:solidFill>
+                <a:latin typeface="Calibri"/>
+              </a:rPr>
+              <a:t>Erroneous (invalid) data: out-of-range or wrong-type values the program should reject gracefully.</a:t>
+            </a:r>
+          </a:p>
+          <a:p>
+            <a:pPr/>
+            <a:r>
+              <a:rPr sz="2000" b="0">
+                <a:solidFill>
+                  <a:srgbClr val="222222"/>
+                </a:solidFill>
+                <a:latin typeface="Calibri"/>
+              </a:rPr>
+              <a:t>A good test plan states the data, its type, the expected result and the actual result.</a:t>
+            </a:r>
+          </a:p>
+          <a:p>
+            <a:pPr/>
+            <a:r>
+              <a:rPr sz="1800" b="1">
+                <a:solidFill>
+                  <a:srgbClr val="B76E00"/>
+                </a:solidFill>
+                <a:latin typeface="Calibri"/>
+              </a:rPr>
+              <a:t>Boundary means the edge value itself, for example 0 and 50 for a 0 to 50 range, not just outside it.</a:t>
+            </a:r>
+          </a:p>
+        </p:txBody>
+      </p:sp>
+    </p:spTree>
+  </p:cSld>
+  <p:clrMapOvr>
+    <a:masterClrMapping/>
+  </p:clrMapOvr>
+</p:sld>
+</file>
+
+<file path=ppt/slides/slide15.xml><?xml version="1.0" encoding="utf-8"?>
+<p:sld xmlns:a="http://schemas.openxmlformats.org/drawingml/2006/main" xmlns:p="http://schemas.openxmlformats.org/presentationml/2006/main" xmlns:r="http://schemas.openxmlformats.org/officeDocument/2006/relationships">
+  <p:cSld>
+    <p:bg>
+      <p:bgPr>
+        <a:solidFill>
+          <a:srgbClr val="FFFFFF"/>
+        </a:solidFill>
+        <a:effectLst/>
+      </p:bgPr>
+    </p:bg>
+    <p:spTree>
+      <p:nvGrpSpPr>
+        <p:cNvPr id="1" name=""/>
+        <p:cNvGrpSpPr/>
+        <p:nvPr/>
+      </p:nvGrpSpPr>
+      <p:grpSpPr/>
+      <p:sp>
+        <p:nvSpPr>
+          <p:cNvPr id="2" name="TextBox 1"/>
+          <p:cNvSpPr txBox="1"/>
+          <p:nvPr/>
+        </p:nvSpPr>
+        <p:spPr>
+          <a:xfrm>
+            <a:off x="548640" y="274320"/>
+            <a:ext cx="11064240" cy="822960"/>
+          </a:xfrm>
+          <a:prstGeom prst="rect">
+            <a:avLst/>
+          </a:prstGeom>
+          <a:noFill/>
+        </p:spPr>
+        <p:txBody>
+          <a:bodyPr wrap="square">
+            <a:spAutoFit/>
+          </a:bodyPr>
+          <a:lstStyle/>
+          <a:p>
+            <a:r>
+              <a:rPr sz="3000" b="1" i="0">
+                <a:solidFill>
+                  <a:srgbClr val="2B6CB0"/>
+                </a:solidFill>
+                <a:latin typeface="Calibri"/>
+              </a:rPr>
+              <a:t>Testing across the lifecycle and evaluation</a:t>
+            </a:r>
+          </a:p>
+        </p:txBody>
+      </p:sp>
+      <p:sp>
+        <p:nvSpPr>
+          <p:cNvPr id="3" name="TextBox 2"/>
+          <p:cNvSpPr txBox="1"/>
+          <p:nvPr/>
+        </p:nvSpPr>
+        <p:spPr>
+          <a:xfrm>
+            <a:off x="640080" y="1280160"/>
+            <a:ext cx="10881360" cy="5120640"/>
+          </a:xfrm>
+          <a:prstGeom prst="rect">
+            <a:avLst/>
+          </a:prstGeom>
+          <a:noFill/>
+        </p:spPr>
+        <p:txBody>
+          <a:bodyPr wrap="square">
+            <a:spAutoFit/>
+          </a:bodyPr>
+          <a:lstStyle/>
+          <a:p>
+            <a:pPr/>
+            <a:r>
+              <a:rPr sz="2000" b="0">
+                <a:solidFill>
+                  <a:srgbClr val="222222"/>
+                </a:solidFill>
+                <a:latin typeface="Calibri"/>
+              </a:rPr>
+              <a:t>Iterative methodologies test throughout development, not only in a final testing stage.</a:t>
+            </a:r>
+          </a:p>
+          <a:p>
+            <a:pPr/>
+            <a:r>
+              <a:rPr sz="2000" b="0">
+                <a:solidFill>
+                  <a:srgbClr val="222222"/>
+                </a:solidFill>
+                <a:latin typeface="Calibri"/>
+              </a:rPr>
+              <a:t>Alpha testing is done in-house by the developers; beta testing by a limited group of real users.</a:t>
+            </a:r>
+          </a:p>
+          <a:p>
+            <a:pPr/>
+            <a:r>
+              <a:rPr sz="2000" b="0">
+                <a:solidFill>
+                  <a:srgbClr val="222222"/>
+                </a:solidFill>
+                <a:latin typeface="Calibri"/>
+              </a:rPr>
+              <a:t>Beta feedback catches problems developers missed because real users behave unexpectedly.</a:t>
+            </a:r>
+          </a:p>
+          <a:p>
+            <a:pPr/>
+            <a:r>
+              <a:rPr sz="2000" b="0">
+                <a:solidFill>
+                  <a:srgbClr val="222222"/>
+                </a:solidFill>
+                <a:latin typeface="Calibri"/>
+              </a:rPr>
+              <a:t>Evaluation judges the finished system against the original requirements: effective, usable, robust, maintainable.</a:t>
+            </a:r>
+          </a:p>
+        </p:txBody>
+      </p:sp>
+    </p:spTree>
+  </p:cSld>
+  <p:clrMapOvr>
+    <a:masterClrMapping/>
+  </p:clrMapOvr>
+</p:sld>
+</file>
+
+<file path=ppt/slides/slide16.xml><?xml version="1.0" encoding="utf-8"?>
+<p:sld xmlns:a="http://schemas.openxmlformats.org/drawingml/2006/main" xmlns:p="http://schemas.openxmlformats.org/presentationml/2006/main" xmlns:r="http://schemas.openxmlformats.org/officeDocument/2006/relationships">
+  <p:cSld>
+    <p:bg>
+      <p:bgPr>
+        <a:solidFill>
+          <a:srgbClr val="FFFFFF"/>
+        </a:solidFill>
+        <a:effectLst/>
+      </p:bgPr>
+    </p:bg>
+    <p:spTree>
+      <p:nvGrpSpPr>
+        <p:cNvPr id="1" name=""/>
+        <p:cNvGrpSpPr/>
+        <p:nvPr/>
+      </p:nvGrpSpPr>
+      <p:grpSpPr/>
+      <p:sp>
+        <p:nvSpPr>
+          <p:cNvPr id="2" name="TextBox 1"/>
+          <p:cNvSpPr txBox="1"/>
+          <p:nvPr/>
+        </p:nvSpPr>
+        <p:spPr>
+          <a:xfrm>
+            <a:off x="548640" y="274320"/>
+            <a:ext cx="11064240" cy="822960"/>
+          </a:xfrm>
+          <a:prstGeom prst="rect">
+            <a:avLst/>
+          </a:prstGeom>
+          <a:noFill/>
+        </p:spPr>
+        <p:txBody>
+          <a:bodyPr wrap="square">
+            <a:spAutoFit/>
+          </a:bodyPr>
+          <a:lstStyle/>
+          <a:p>
+            <a:r>
+              <a:rPr sz="3000" b="1" i="0">
+                <a:solidFill>
+                  <a:srgbClr val="2B6CB0"/>
+                </a:solidFill>
+                <a:latin typeface="Calibri"/>
+              </a:rPr>
+              <a:t>Worked example 1</a:t>
+            </a:r>
+          </a:p>
+        </p:txBody>
+      </p:sp>
+      <p:sp>
+        <p:nvSpPr>
+          <p:cNvPr id="3" name="TextBox 2"/>
+          <p:cNvSpPr txBox="1"/>
+          <p:nvPr/>
+        </p:nvSpPr>
+        <p:spPr>
+          <a:xfrm>
+            <a:off x="640080" y="1280160"/>
+            <a:ext cx="10881360" cy="5120640"/>
+          </a:xfrm>
+          <a:prstGeom prst="rect">
+            <a:avLst/>
+          </a:prstGeom>
+          <a:noFill/>
+        </p:spPr>
+        <p:txBody>
+          <a:bodyPr wrap="square">
+            <a:spAutoFit/>
+          </a:bodyPr>
+          <a:lstStyle/>
+          <a:p>
+            <a:pPr/>
             <a:r>
               <a:rPr sz="2200" b="1">
                 <a:solidFill>
-                  <a:srgbClr val="222222"/>
-                </a:solidFill>
-                <a:latin typeface="Calibri"/>
-              </a:rPr>
-              <a:t>1. Name the three categories of test data with a one-line description of each.</a:t>
+                  <a:srgbClr val="2B6CB0"/>
+                </a:solidFill>
+                <a:latin typeface="Calibri"/>
+              </a:rPr>
+              <a:t>Choosing a methodology for a high-risk banking system</a:t>
             </a:r>
           </a:p>
           <a:p>
             <a:pPr lvl="1"/>
             <a:r>
-              <a:rPr sz="1800" i="1">
+              <a:rPr sz="1900" b="0">
+                <a:solidFill>
+                  <a:srgbClr val="222222"/>
+                </a:solidFill>
+                <a:latin typeface="Calibri"/>
+              </a:rPr>
+              <a:t>1. Read the scenario clues: large budget, high cost of failure, security-critical and long-lived.</a:t>
+            </a:r>
+          </a:p>
+          <a:p>
+            <a:pPr lvl="1"/>
+            <a:r>
+              <a:rPr sz="1900" b="0">
+                <a:solidFill>
+                  <a:srgbClr val="222222"/>
+                </a:solidFill>
+                <a:latin typeface="Calibri"/>
+              </a:rPr>
+              <a:t>2. Note that requirements are fairly well known but the risk of expensive errors dominates.</a:t>
+            </a:r>
+          </a:p>
+          <a:p>
+            <a:pPr lvl="1"/>
+            <a:r>
+              <a:rPr sz="1900" b="0">
+                <a:solidFill>
+                  <a:srgbClr val="222222"/>
+                </a:solidFill>
+                <a:latin typeface="Calibri"/>
+              </a:rPr>
+              <a:t>3. Rule out Waterfall: no explicit risk handling once the project is mid-flow.</a:t>
+            </a:r>
+          </a:p>
+          <a:p>
+            <a:pPr lvl="1"/>
+            <a:r>
+              <a:rPr sz="1900" b="0">
+                <a:solidFill>
+                  <a:srgbClr val="222222"/>
+                </a:solidFill>
+                <a:latin typeface="Calibri"/>
+              </a:rPr>
+              <a:t>4. Rule out RAD: it prioritises speed over the robustness a bank demands.</a:t>
+            </a:r>
+          </a:p>
+          <a:p>
+            <a:pPr lvl="1"/>
+            <a:r>
+              <a:rPr sz="1900" b="0">
+                <a:solidFill>
+                  <a:srgbClr val="222222"/>
+                </a:solidFill>
+                <a:latin typeface="Calibri"/>
+              </a:rPr>
+              <a:t>5. Select Spiral because each loop performs explicit risk analysis before continuing.</a:t>
+            </a:r>
+          </a:p>
+          <a:p>
+            <a:pPr lvl="1"/>
+            <a:r>
+              <a:rPr sz="1900" b="0">
+                <a:solidFill>
+                  <a:srgbClr val="222222"/>
+                </a:solidFill>
+                <a:latin typeface="Calibri"/>
+              </a:rPr>
+              <a:t>6. Justify: catching costly problems early on a high-cost project reduces the chance of expensive failure.</a:t>
+            </a:r>
+          </a:p>
+          <a:p>
+            <a:pPr lvl="1"/>
+            <a:r>
+              <a:rPr sz="1900" b="0">
+                <a:solidFill>
+                  <a:srgbClr val="222222"/>
+                </a:solidFill>
+                <a:latin typeface="Calibri"/>
+              </a:rPr>
+              <a:t>7. Acknowledge the trade-off: Spiral is itself expensive and complex, which the large budget can absorb.</a:t>
+            </a:r>
+          </a:p>
+        </p:txBody>
+      </p:sp>
+    </p:spTree>
+  </p:cSld>
+  <p:clrMapOvr>
+    <a:masterClrMapping/>
+  </p:clrMapOvr>
+</p:sld>
+</file>
+
+<file path=ppt/slides/slide17.xml><?xml version="1.0" encoding="utf-8"?>
+<p:sld xmlns:a="http://schemas.openxmlformats.org/drawingml/2006/main" xmlns:p="http://schemas.openxmlformats.org/presentationml/2006/main" xmlns:r="http://schemas.openxmlformats.org/officeDocument/2006/relationships">
+  <p:cSld>
+    <p:bg>
+      <p:bgPr>
+        <a:solidFill>
+          <a:srgbClr val="FFFFFF"/>
+        </a:solidFill>
+        <a:effectLst/>
+      </p:bgPr>
+    </p:bg>
+    <p:spTree>
+      <p:nvGrpSpPr>
+        <p:cNvPr id="1" name=""/>
+        <p:cNvGrpSpPr/>
+        <p:nvPr/>
+      </p:nvGrpSpPr>
+      <p:grpSpPr/>
+      <p:sp>
+        <p:nvSpPr>
+          <p:cNvPr id="2" name="TextBox 1"/>
+          <p:cNvSpPr txBox="1"/>
+          <p:nvPr/>
+        </p:nvSpPr>
+        <p:spPr>
+          <a:xfrm>
+            <a:off x="548640" y="274320"/>
+            <a:ext cx="11064240" cy="822960"/>
+          </a:xfrm>
+          <a:prstGeom prst="rect">
+            <a:avLst/>
+          </a:prstGeom>
+          <a:noFill/>
+        </p:spPr>
+        <p:txBody>
+          <a:bodyPr wrap="square">
+            <a:spAutoFit/>
+          </a:bodyPr>
+          <a:lstStyle/>
+          <a:p>
+            <a:r>
+              <a:rPr sz="3000" b="1" i="0">
+                <a:solidFill>
+                  <a:srgbClr val="2B6CB0"/>
+                </a:solidFill>
+                <a:latin typeface="Calibri"/>
+              </a:rPr>
+              <a:t>Worked example 2</a:t>
+            </a:r>
+          </a:p>
+        </p:txBody>
+      </p:sp>
+      <p:sp>
+        <p:nvSpPr>
+          <p:cNvPr id="3" name="TextBox 2"/>
+          <p:cNvSpPr txBox="1"/>
+          <p:nvPr/>
+        </p:nvSpPr>
+        <p:spPr>
+          <a:xfrm>
+            <a:off x="640080" y="1280160"/>
+            <a:ext cx="10881360" cy="5120640"/>
+          </a:xfrm>
+          <a:prstGeom prst="rect">
+            <a:avLst/>
+          </a:prstGeom>
+          <a:noFill/>
+        </p:spPr>
+        <p:txBody>
+          <a:bodyPr wrap="square">
+            <a:spAutoFit/>
+          </a:bodyPr>
+          <a:lstStyle/>
+          <a:p>
+            <a:pPr/>
+            <a:r>
+              <a:rPr sz="2200" b="1">
+                <a:solidFill>
+                  <a:srgbClr val="2B6CB0"/>
+                </a:solidFill>
+                <a:latin typeface="Calibri"/>
+              </a:rPr>
+              <a:t>Designing a test plan for a quiz mark field accepting 0 to 50 inclusive</a:t>
+            </a:r>
+          </a:p>
+          <a:p>
+            <a:pPr lvl="1"/>
+            <a:r>
+              <a:rPr sz="1900" b="0">
+                <a:solidFill>
+                  <a:srgbClr val="222222"/>
+                </a:solidFill>
+                <a:latin typeface="Calibri"/>
+              </a:rPr>
+              <a:t>1. State the rule precisely: accept whole numbers where mark is at least 0 and at most 50.</a:t>
+            </a:r>
+          </a:p>
+          <a:p>
+            <a:pPr lvl="1"/>
+            <a:r>
+              <a:rPr sz="1900" b="0">
+                <a:solidFill>
+                  <a:srgbClr val="222222"/>
+                </a:solidFill>
+                <a:latin typeface="Calibri"/>
+              </a:rPr>
+              <a:t>2. Normal data: 25, a typical in-range value; expected result accept.</a:t>
+            </a:r>
+          </a:p>
+          <a:p>
+            <a:pPr lvl="1"/>
+            <a:r>
+              <a:rPr sz="1900" b="0">
+                <a:solidFill>
+                  <a:srgbClr val="222222"/>
+                </a:solidFill>
+                <a:latin typeface="Calibri"/>
+              </a:rPr>
+              <a:t>3. Boundary data: 0 and 50, the exact edges of the range; both expected to be accepted.</a:t>
+            </a:r>
+          </a:p>
+          <a:p>
+            <a:pPr lvl="1"/>
+            <a:r>
+              <a:rPr sz="1900" b="0">
+                <a:solidFill>
+                  <a:srgbClr val="222222"/>
+                </a:solidFill>
+                <a:latin typeface="Calibri"/>
+              </a:rPr>
+              <a:t>4. Erroneous data: -1 and 51, one below and one above the range; both expected to be rejected.</a:t>
+            </a:r>
+          </a:p>
+          <a:p>
+            <a:pPr lvl="1"/>
+            <a:r>
+              <a:rPr sz="1900" b="0">
+                <a:solidFill>
+                  <a:srgbClr val="222222"/>
+                </a:solidFill>
+                <a:latin typeface="Calibri"/>
+              </a:rPr>
+              <a:t>5. Erroneous data of the wrong type: the text ten; expected to be rejected with an error message.</a:t>
+            </a:r>
+          </a:p>
+          <a:p>
+            <a:pPr lvl="1"/>
+            <a:r>
+              <a:rPr sz="1900" b="0">
+                <a:solidFill>
+                  <a:srgbClr val="222222"/>
+                </a:solidFill>
+                <a:latin typeface="Calibri"/>
+              </a:rPr>
+              <a:t>6. Check each value against the rule: 0 and 50 satisfy it, -1 and 51 do not, so the expectations are correct.</a:t>
+            </a:r>
+          </a:p>
+        </p:txBody>
+      </p:sp>
+    </p:spTree>
+  </p:cSld>
+  <p:clrMapOvr>
+    <a:masterClrMapping/>
+  </p:clrMapOvr>
+</p:sld>
+</file>
+
+<file path=ppt/slides/slide18.xml><?xml version="1.0" encoding="utf-8"?>
+<p:sld xmlns:a="http://schemas.openxmlformats.org/drawingml/2006/main" xmlns:p="http://schemas.openxmlformats.org/presentationml/2006/main" xmlns:r="http://schemas.openxmlformats.org/officeDocument/2006/relationships">
+  <p:cSld>
+    <p:bg>
+      <p:bgPr>
+        <a:solidFill>
+          <a:srgbClr val="FFFFFF"/>
+        </a:solidFill>
+        <a:effectLst/>
+      </p:bgPr>
+    </p:bg>
+    <p:spTree>
+      <p:nvGrpSpPr>
+        <p:cNvPr id="1" name=""/>
+        <p:cNvGrpSpPr/>
+        <p:nvPr/>
+      </p:nvGrpSpPr>
+      <p:grpSpPr/>
+      <p:sp>
+        <p:nvSpPr>
+          <p:cNvPr id="2" name="TextBox 1"/>
+          <p:cNvSpPr txBox="1"/>
+          <p:nvPr/>
+        </p:nvSpPr>
+        <p:spPr>
+          <a:xfrm>
+            <a:off x="548640" y="274320"/>
+            <a:ext cx="11064240" cy="822960"/>
+          </a:xfrm>
+          <a:prstGeom prst="rect">
+            <a:avLst/>
+          </a:prstGeom>
+          <a:noFill/>
+        </p:spPr>
+        <p:txBody>
+          <a:bodyPr wrap="square">
+            <a:spAutoFit/>
+          </a:bodyPr>
+          <a:lstStyle/>
+          <a:p>
+            <a:r>
+              <a:rPr sz="3000" b="1" i="0">
+                <a:solidFill>
+                  <a:srgbClr val="2B6CB0"/>
+                </a:solidFill>
+                <a:latin typeface="Calibri"/>
+              </a:rPr>
+              <a:t>Worked example 3</a:t>
+            </a:r>
+          </a:p>
+        </p:txBody>
+      </p:sp>
+      <p:sp>
+        <p:nvSpPr>
+          <p:cNvPr id="3" name="TextBox 2"/>
+          <p:cNvSpPr txBox="1"/>
+          <p:nvPr/>
+        </p:nvSpPr>
+        <p:spPr>
+          <a:xfrm>
+            <a:off x="640080" y="1280160"/>
+            <a:ext cx="10881360" cy="5120640"/>
+          </a:xfrm>
+          <a:prstGeom prst="rect">
+            <a:avLst/>
+          </a:prstGeom>
+          <a:noFill/>
+        </p:spPr>
+        <p:txBody>
+          <a:bodyPr wrap="square">
+            <a:spAutoFit/>
+          </a:bodyPr>
+          <a:lstStyle/>
+          <a:p>
+            <a:pPr/>
+            <a:r>
+              <a:rPr sz="2200" b="1">
+                <a:solidFill>
+                  <a:srgbClr val="2B6CB0"/>
+                </a:solidFill>
+                <a:latin typeface="Calibri"/>
+              </a:rPr>
+              <a:t>Following an algorithm with a trace table</a:t>
+            </a:r>
+          </a:p>
+          <a:p>
+            <a:pPr lvl="1"/>
+            <a:r>
+              <a:rPr sz="1900" b="0">
+                <a:solidFill>
+                  <a:srgbClr val="222222"/>
+                </a:solidFill>
+                <a:latin typeface="Calibri"/>
+              </a:rPr>
+              <a:t>1. Algorithm: total = 0, then loop i from 1 to 4 inputting num and adding it to total, then output total / 4.</a:t>
+            </a:r>
+          </a:p>
+          <a:p>
+            <a:pPr lvl="1"/>
+            <a:r>
+              <a:rPr sz="1900" b="0">
+                <a:solidFill>
+                  <a:srgbClr val="222222"/>
+                </a:solidFill>
+                <a:latin typeface="Calibri"/>
+              </a:rPr>
+              <a:t>2. Inputs supplied in order: 4, 8, 6, 2.</a:t>
+            </a:r>
+          </a:p>
+          <a:p>
+            <a:pPr lvl="1"/>
+            <a:r>
+              <a:rPr sz="1900" b="0">
+                <a:solidFill>
+                  <a:srgbClr val="222222"/>
+                </a:solidFill>
+                <a:latin typeface="Calibri"/>
+              </a:rPr>
+              <a:t>3. i = 1: num = 4, total = 0 + 4 = 4.</a:t>
+            </a:r>
+          </a:p>
+          <a:p>
+            <a:pPr lvl="1"/>
+            <a:r>
+              <a:rPr sz="1900" b="0">
+                <a:solidFill>
+                  <a:srgbClr val="222222"/>
+                </a:solidFill>
+                <a:latin typeface="Calibri"/>
+              </a:rPr>
+              <a:t>4. i = 2: num = 8, total = 4 + 8 = 12.</a:t>
+            </a:r>
+          </a:p>
+          <a:p>
+            <a:pPr lvl="1"/>
+            <a:r>
+              <a:rPr sz="1900" b="0">
+                <a:solidFill>
+                  <a:srgbClr val="222222"/>
+                </a:solidFill>
+                <a:latin typeface="Calibri"/>
+              </a:rPr>
+              <a:t>5. i = 3: num = 6, total = 12 + 6 = 18.</a:t>
+            </a:r>
+          </a:p>
+          <a:p>
+            <a:pPr lvl="1"/>
+            <a:r>
+              <a:rPr sz="1900" b="0">
+                <a:solidFill>
+                  <a:srgbClr val="222222"/>
+                </a:solidFill>
+                <a:latin typeface="Calibri"/>
+              </a:rPr>
+              <a:t>6. i = 4: num = 2, total = 18 + 2 = 20.</a:t>
+            </a:r>
+          </a:p>
+          <a:p>
+            <a:pPr lvl="1"/>
+            <a:r>
+              <a:rPr sz="1900" b="0">
+                <a:solidFill>
+                  <a:srgbClr val="222222"/>
+                </a:solidFill>
+                <a:latin typeface="Calibri"/>
+              </a:rPr>
+              <a:t>7. Loop ends; output total / 4 = 20 / 4 = 5, the mean of the four inputs.</a:t>
+            </a:r>
+          </a:p>
+        </p:txBody>
+      </p:sp>
+    </p:spTree>
+  </p:cSld>
+  <p:clrMapOvr>
+    <a:masterClrMapping/>
+  </p:clrMapOvr>
+</p:sld>
+</file>
+
+<file path=ppt/slides/slide19.xml><?xml version="1.0" encoding="utf-8"?>
+<p:sld xmlns:a="http://schemas.openxmlformats.org/drawingml/2006/main" xmlns:p="http://schemas.openxmlformats.org/presentationml/2006/main" xmlns:r="http://schemas.openxmlformats.org/officeDocument/2006/relationships">
+  <p:cSld>
+    <p:bg>
+      <p:bgPr>
+        <a:solidFill>
+          <a:srgbClr val="FFFFFF"/>
+        </a:solidFill>
+        <a:effectLst/>
+      </p:bgPr>
+    </p:bg>
+    <p:spTree>
+      <p:nvGrpSpPr>
+        <p:cNvPr id="1" name=""/>
+        <p:cNvGrpSpPr/>
+        <p:nvPr/>
+      </p:nvGrpSpPr>
+      <p:grpSpPr/>
+      <p:sp>
+        <p:nvSpPr>
+          <p:cNvPr id="2" name="TextBox 1"/>
+          <p:cNvSpPr txBox="1"/>
+          <p:nvPr/>
+        </p:nvSpPr>
+        <p:spPr>
+          <a:xfrm>
+            <a:off x="548640" y="274320"/>
+            <a:ext cx="11064240" cy="822960"/>
+          </a:xfrm>
+          <a:prstGeom prst="rect">
+            <a:avLst/>
+          </a:prstGeom>
+          <a:noFill/>
+        </p:spPr>
+        <p:txBody>
+          <a:bodyPr wrap="square">
+            <a:spAutoFit/>
+          </a:bodyPr>
+          <a:lstStyle/>
+          <a:p>
+            <a:r>
+              <a:rPr sz="3000" b="1" i="0">
+                <a:solidFill>
+                  <a:srgbClr val="2B6CB0"/>
+                </a:solidFill>
+                <a:latin typeface="Calibri"/>
+              </a:rPr>
+              <a:t>Activity 1</a:t>
+            </a:r>
+          </a:p>
+        </p:txBody>
+      </p:sp>
+      <p:sp>
+        <p:nvSpPr>
+          <p:cNvPr id="3" name="TextBox 2"/>
+          <p:cNvSpPr txBox="1"/>
+          <p:nvPr/>
+        </p:nvSpPr>
+        <p:spPr>
+          <a:xfrm>
+            <a:off x="640080" y="1280160"/>
+            <a:ext cx="10881360" cy="5120640"/>
+          </a:xfrm>
+          <a:prstGeom prst="rect">
+            <a:avLst/>
+          </a:prstGeom>
+          <a:noFill/>
+        </p:spPr>
+        <p:txBody>
+          <a:bodyPr wrap="square">
+            <a:spAutoFit/>
+          </a:bodyPr>
+          <a:lstStyle/>
+          <a:p>
+            <a:pPr/>
+            <a:r>
+              <a:rPr sz="2200" b="1">
+                <a:solidFill>
+                  <a:srgbClr val="2B6CB0"/>
+                </a:solidFill>
+                <a:latin typeface="Calibri"/>
+              </a:rPr>
+              <a:t>Methodology expert jigsaw  (20 min)</a:t>
+            </a:r>
+          </a:p>
+          <a:p>
+            <a:pPr lvl="1"/>
+            <a:r>
+              <a:rPr sz="2000" b="0">
+                <a:solidFill>
+                  <a:srgbClr val="222222"/>
+                </a:solidFill>
+                <a:latin typeface="Calibri"/>
+              </a:rPr>
+              <a:t>Home groups of five number off: 1 Waterfall, 2 Agile, 3 XP, 4 Spiral, 5 RAD; experts regroup by number.</a:t>
+            </a:r>
+          </a:p>
+          <a:p>
+            <a:pPr lvl="1"/>
+            <a:r>
+              <a:rPr sz="2000" b="0">
+                <a:solidFill>
+                  <a:srgbClr val="222222"/>
+                </a:solidFill>
+                <a:latin typeface="Calibri"/>
+              </a:rPr>
+              <a:t>Expert groups agree the key idea, one strength, one weakness and the tell-tale scenario clue that says pick me.</a:t>
+            </a:r>
+          </a:p>
+          <a:p>
+            <a:pPr lvl="1"/>
+            <a:r>
+              <a:rPr sz="2000" b="0">
+                <a:solidFill>
+                  <a:srgbClr val="222222"/>
+                </a:solidFill>
+                <a:latin typeface="Calibri"/>
+              </a:rPr>
+              <a:t>Back in home groups each expert teaches for 60 seconds while listeners keep pens down.</a:t>
+            </a:r>
+          </a:p>
+          <a:p>
+            <a:pPr lvl="1"/>
+            <a:r>
+              <a:rPr sz="2000" b="0">
+                <a:solidFill>
+                  <a:srgbClr val="222222"/>
+                </a:solidFill>
+                <a:latin typeface="Calibri"/>
+              </a:rPr>
+              <a:t>Teacher reads three scenarios: a bank payroll system with legally fixed requirements; a startup that keeps changing its mind and needs something next month; crewed-flight software with a huge budget where failure is catastrophic.</a:t>
+            </a:r>
+          </a:p>
+          <a:p>
+            <a:pPr lvl="1"/>
+            <a:r>
+              <a:rPr sz="2000" b="0">
+                <a:solidFill>
+                  <a:srgbClr val="222222"/>
+                </a:solidFill>
+                <a:latin typeface="Calibri"/>
+              </a:rPr>
+              <a:t>Home groups hold up the methodology and the clue word that justified it, then everyone writes the strength and weakness of a methodology they did not teach.</a:t>
+            </a:r>
+          </a:p>
+          <a:p>
+            <a:pPr/>
+            <a:r>
+              <a:rPr sz="1800" b="0">
                 <a:solidFill>
                   <a:srgbClr val="B76E00"/>
                 </a:solidFill>
                 <a:latin typeface="Calibri"/>
               </a:rPr>
-              <a:t>Answer: Normal/valid (typical in-range, accepted), boundary (at the edges of the range), erroneous/invalid (out of range, rejected).</a:t>
-            </a:r>
-          </a:p>
-          <a:p>
-            <a:r>
-              <a:rPr sz="2200" b="1">
-                <a:solidFill>
-                  <a:srgbClr val="222222"/>
-                </a:solidFill>
-                <a:latin typeface="Calibri"/>
-              </a:rPr>
-              <a:t>2. Give one advantage and one disadvantage of Waterfall.</a:t>
-            </a:r>
-          </a:p>
-          <a:p>
-            <a:pPr lvl="1"/>
-            <a:r>
-              <a:rPr sz="1800" i="1">
-                <a:solidFill>
-                  <a:srgbClr val="B76E00"/>
-                </a:solidFill>
-                <a:latin typeface="Calibri"/>
-              </a:rPr>
-              <a:t>Answer: Advantage: simple and well documented; disadvantage: inflexible and the client only sees the product at the end.</a:t>
-            </a:r>
-          </a:p>
-          <a:p>
-            <a:r>
-              <a:rPr sz="2200" b="1">
-                <a:solidFill>
-                  <a:srgbClr val="222222"/>
-                </a:solidFill>
-                <a:latin typeface="Calibri"/>
-              </a:rPr>
-              <a:t>3. Why is Agile often better than Waterfall when requirements are unclear or likely to change?</a:t>
-            </a:r>
-          </a:p>
-          <a:p>
-            <a:pPr lvl="1"/>
-            <a:r>
-              <a:rPr sz="1800" i="1">
-                <a:solidFill>
-                  <a:srgbClr val="B76E00"/>
-                </a:solidFill>
-                <a:latin typeface="Calibri"/>
-              </a:rPr>
-              <a:t>Answer: It works in iterative increments with continuous client feedback, so new or changed requirements are built into the next iteration rather than fixed at the start.</a:t>
+              <a:t>Stretch: Experts also state what their methodology costs you: Waterfall hides the product until the end, Agile has unpredictable cost, XP is staff-intensive, Spiral is expensive, RAD sacrifices robustness.</a:t>
             </a:r>
           </a:p>
         </p:txBody>
@@ -3854,7 +4916,7 @@
                 </a:solidFill>
                 <a:latin typeface="Calibri"/>
               </a:rPr>
-              <a:t>Compare the Waterfall, Agile, Extreme Programming, Spiral and RAD methodologies and their trade-offs.</a:t>
+              <a:t>Describe the stages of the software development lifecycle and the outputs of each stage.</a:t>
             </a:r>
           </a:p>
           <a:p>
@@ -3866,7 +4928,7 @@
                 </a:solidFill>
                 <a:latin typeface="Calibri"/>
               </a:rPr>
-              <a:t>Describe the stages of the software development lifecycle from analysis to evaluation.</a:t>
+              <a:t>Compare the merits and drawbacks of Waterfall, Agile, Extreme Programming, Spiral and RAD.</a:t>
             </a:r>
           </a:p>
           <a:p>
@@ -3878,7 +4940,1453 @@
                 </a:solidFill>
                 <a:latin typeface="Calibri"/>
               </a:rPr>
-              <a:t>Select and justify a suitable methodology for a given scenario using its clues.</a:t>
+              <a:t>Select and justify a methodology for a given scenario using explicit scenario clues.</a:t>
+            </a:r>
+          </a:p>
+          <a:p>
+            <a:pPr lvl="1"/>
+            <a:r>
+              <a:rPr sz="2200" b="0">
+                <a:solidFill>
+                  <a:srgbClr val="222222"/>
+                </a:solidFill>
+                <a:latin typeface="Calibri"/>
+              </a:rPr>
+              <a:t>Write and follow algorithms, and design test data using normal, boundary and erroneous values.</a:t>
+            </a:r>
+          </a:p>
+        </p:txBody>
+      </p:sp>
+    </p:spTree>
+  </p:cSld>
+  <p:clrMapOvr>
+    <a:masterClrMapping/>
+  </p:clrMapOvr>
+</p:sld>
+</file>
+
+<file path=ppt/slides/slide20.xml><?xml version="1.0" encoding="utf-8"?>
+<p:sld xmlns:a="http://schemas.openxmlformats.org/drawingml/2006/main" xmlns:p="http://schemas.openxmlformats.org/presentationml/2006/main" xmlns:r="http://schemas.openxmlformats.org/officeDocument/2006/relationships">
+  <p:cSld>
+    <p:bg>
+      <p:bgPr>
+        <a:solidFill>
+          <a:srgbClr val="FFFFFF"/>
+        </a:solidFill>
+        <a:effectLst/>
+      </p:bgPr>
+    </p:bg>
+    <p:spTree>
+      <p:nvGrpSpPr>
+        <p:cNvPr id="1" name=""/>
+        <p:cNvGrpSpPr/>
+        <p:nvPr/>
+      </p:nvGrpSpPr>
+      <p:grpSpPr/>
+      <p:sp>
+        <p:nvSpPr>
+          <p:cNvPr id="2" name="TextBox 1"/>
+          <p:cNvSpPr txBox="1"/>
+          <p:nvPr/>
+        </p:nvSpPr>
+        <p:spPr>
+          <a:xfrm>
+            <a:off x="548640" y="274320"/>
+            <a:ext cx="11064240" cy="822960"/>
+          </a:xfrm>
+          <a:prstGeom prst="rect">
+            <a:avLst/>
+          </a:prstGeom>
+          <a:noFill/>
+        </p:spPr>
+        <p:txBody>
+          <a:bodyPr wrap="square">
+            <a:spAutoFit/>
+          </a:bodyPr>
+          <a:lstStyle/>
+          <a:p>
+            <a:r>
+              <a:rPr sz="3000" b="1" i="0">
+                <a:solidFill>
+                  <a:srgbClr val="2B6CB0"/>
+                </a:solidFill>
+                <a:latin typeface="Calibri"/>
+              </a:rPr>
+              <a:t>Activity 2</a:t>
+            </a:r>
+          </a:p>
+        </p:txBody>
+      </p:sp>
+      <p:sp>
+        <p:nvSpPr>
+          <p:cNvPr id="3" name="TextBox 2"/>
+          <p:cNvSpPr txBox="1"/>
+          <p:nvPr/>
+        </p:nvSpPr>
+        <p:spPr>
+          <a:xfrm>
+            <a:off x="640080" y="1280160"/>
+            <a:ext cx="10881360" cy="5120640"/>
+          </a:xfrm>
+          <a:prstGeom prst="rect">
+            <a:avLst/>
+          </a:prstGeom>
+          <a:noFill/>
+        </p:spPr>
+        <p:txBody>
+          <a:bodyPr wrap="square">
+            <a:spAutoFit/>
+          </a:bodyPr>
+          <a:lstStyle/>
+          <a:p>
+            <a:pPr/>
+            <a:r>
+              <a:rPr sz="2200" b="1">
+                <a:solidFill>
+                  <a:srgbClr val="2B6CB0"/>
+                </a:solidFill>
+                <a:latin typeface="Calibri"/>
+              </a:rPr>
+              <a:t>Waterfall to Agile decision continuum  (10 min)</a:t>
+            </a:r>
+          </a:p>
+          <a:p>
+            <a:pPr lvl="1"/>
+            <a:r>
+              <a:rPr sz="2000" b="0">
+                <a:solidFill>
+                  <a:srgbClr val="222222"/>
+                </a:solidFill>
+                <a:latin typeface="Calibri"/>
+              </a:rPr>
+              <a:t>Mark a line across the room: one wall is pure Waterfall, the other pure Agile.</a:t>
+            </a:r>
+          </a:p>
+          <a:p>
+            <a:pPr lvl="1"/>
+            <a:r>
+              <a:rPr sz="2000" b="0">
+                <a:solidFill>
+                  <a:srgbClr val="222222"/>
+                </a:solidFill>
+                <a:latin typeface="Calibri"/>
+              </a:rPr>
+              <a:t>Read scenarios one at a time: an air-traffic-control replacement with full documentation demanded up front; a social app for a market that shifts monthly; a client who will know what they want when they see it; a fixed-price contract with penalty clauses; a studio prototyping game ideas.</a:t>
+            </a:r>
+          </a:p>
+          <a:p>
+            <a:pPr lvl="1"/>
+            <a:r>
+              <a:rPr sz="2000" b="0">
+                <a:solidFill>
+                  <a:srgbClr val="222222"/>
+                </a:solidFill>
+                <a:latin typeface="Calibri"/>
+              </a:rPr>
+              <a:t>Students take a position and must name the scenario clue that put them there when interviewed.</a:t>
+            </a:r>
+          </a:p>
+          <a:p>
+            <a:pPr lvl="1"/>
+            <a:r>
+              <a:rPr sz="2000" b="0">
+                <a:solidFill>
+                  <a:srgbClr val="222222"/>
+                </a:solidFill>
+                <a:latin typeface="Calibri"/>
+              </a:rPr>
+              <a:t>Middle-standers must describe the hybrid they would actually run; then three students move to the opposite half and steelman that position.</a:t>
+            </a:r>
+          </a:p>
+          <a:p>
+            <a:pPr/>
+            <a:r>
+              <a:rPr sz="1800" b="0">
+                <a:solidFill>
+                  <a:srgbClr val="B76E00"/>
+                </a:solidFill>
+                <a:latin typeface="Calibri"/>
+              </a:rPr>
+              <a:t>Stretch: Ask where Spiral lives on this line and why that is a trick question: it is iterative like Agile but heavyweight like Waterfall, and risk analysis is an axis the line does not show.</a:t>
+            </a:r>
+          </a:p>
+        </p:txBody>
+      </p:sp>
+    </p:spTree>
+  </p:cSld>
+  <p:clrMapOvr>
+    <a:masterClrMapping/>
+  </p:clrMapOvr>
+</p:sld>
+</file>
+
+<file path=ppt/slides/slide21.xml><?xml version="1.0" encoding="utf-8"?>
+<p:sld xmlns:a="http://schemas.openxmlformats.org/drawingml/2006/main" xmlns:p="http://schemas.openxmlformats.org/presentationml/2006/main" xmlns:r="http://schemas.openxmlformats.org/officeDocument/2006/relationships">
+  <p:cSld>
+    <p:bg>
+      <p:bgPr>
+        <a:solidFill>
+          <a:srgbClr val="FFFFFF"/>
+        </a:solidFill>
+        <a:effectLst/>
+      </p:bgPr>
+    </p:bg>
+    <p:spTree>
+      <p:nvGrpSpPr>
+        <p:cNvPr id="1" name=""/>
+        <p:cNvGrpSpPr/>
+        <p:nvPr/>
+      </p:nvGrpSpPr>
+      <p:grpSpPr/>
+      <p:sp>
+        <p:nvSpPr>
+          <p:cNvPr id="2" name="TextBox 1"/>
+          <p:cNvSpPr txBox="1"/>
+          <p:nvPr/>
+        </p:nvSpPr>
+        <p:spPr>
+          <a:xfrm>
+            <a:off x="548640" y="274320"/>
+            <a:ext cx="11064240" cy="822960"/>
+          </a:xfrm>
+          <a:prstGeom prst="rect">
+            <a:avLst/>
+          </a:prstGeom>
+          <a:noFill/>
+        </p:spPr>
+        <p:txBody>
+          <a:bodyPr wrap="square">
+            <a:spAutoFit/>
+          </a:bodyPr>
+          <a:lstStyle/>
+          <a:p>
+            <a:r>
+              <a:rPr sz="3000" b="1" i="0">
+                <a:solidFill>
+                  <a:srgbClr val="2B6CB0"/>
+                </a:solidFill>
+                <a:latin typeface="Calibri"/>
+              </a:rPr>
+              <a:t>Activity 3</a:t>
+            </a:r>
+          </a:p>
+        </p:txBody>
+      </p:sp>
+      <p:sp>
+        <p:nvSpPr>
+          <p:cNvPr id="3" name="TextBox 2"/>
+          <p:cNvSpPr txBox="1"/>
+          <p:nvPr/>
+        </p:nvSpPr>
+        <p:spPr>
+          <a:xfrm>
+            <a:off x="640080" y="1280160"/>
+            <a:ext cx="10881360" cy="5120640"/>
+          </a:xfrm>
+          <a:prstGeom prst="rect">
+            <a:avLst/>
+          </a:prstGeom>
+          <a:noFill/>
+        </p:spPr>
+        <p:txBody>
+          <a:bodyPr wrap="square">
+            <a:spAutoFit/>
+          </a:bodyPr>
+          <a:lstStyle/>
+          <a:p>
+            <a:pPr/>
+            <a:r>
+              <a:rPr sz="2200" b="1">
+                <a:solidFill>
+                  <a:srgbClr val="2B6CB0"/>
+                </a:solidFill>
+                <a:latin typeface="Calibri"/>
+              </a:rPr>
+              <a:t>Doomed by design  (10 min)</a:t>
+            </a:r>
+          </a:p>
+          <a:p>
+            <a:pPr lvl="1"/>
+            <a:r>
+              <a:rPr sz="2000" b="0">
+                <a:solidFill>
+                  <a:srgbClr val="222222"/>
+                </a:solidFill>
+                <a:latin typeface="Calibri"/>
+              </a:rPr>
+              <a:t>Each student picks a project scenario and secretly assigns it the most catastrophically wrong methodology, such as Waterfall for a startup that pivots weekly or RAD for a pacemaker.</a:t>
+            </a:r>
+          </a:p>
+          <a:p>
+            <a:pPr lvl="1"/>
+            <a:r>
+              <a:rPr sz="2000" b="0">
+                <a:solidFill>
+                  <a:srgbClr val="222222"/>
+                </a:solidFill>
+                <a:latin typeface="Calibri"/>
+              </a:rPr>
+              <a:t>Pairs swap disasters; the partner narrates specifically how the project dies, naming the stage, the missing artefact and the raging stakeholder, using correct terminology.</a:t>
+            </a:r>
+          </a:p>
+          <a:p>
+            <a:pPr lvl="1"/>
+            <a:r>
+              <a:rPr sz="2000" b="0">
+                <a:solidFill>
+                  <a:srgbClr val="222222"/>
+                </a:solidFill>
+                <a:latin typeface="Calibri"/>
+              </a:rPr>
+              <a:t>The funniest technically accurate disaster is performed for the class in 30 seconds.</a:t>
+            </a:r>
+          </a:p>
+          <a:p>
+            <a:pPr lvl="1"/>
+            <a:r>
+              <a:rPr sz="2000" b="0">
+                <a:solidFill>
+                  <a:srgbClr val="222222"/>
+                </a:solidFill>
+                <a:latin typeface="Calibri"/>
+              </a:rPr>
+              <a:t>The class then prescribes the correct methodology and names the scenario clue that dictates it.</a:t>
+            </a:r>
+          </a:p>
+          <a:p>
+            <a:pPr/>
+            <a:r>
+              <a:rPr sz="1800" b="0">
+                <a:solidFill>
+                  <a:srgbClr val="B76E00"/>
+                </a:solidFill>
+                <a:latin typeface="Calibri"/>
+              </a:rPr>
+              <a:t>Stretch: Ruin a project twice: show how even the right methodology fails when a precondition such as committed users, skilled developers or an available customer is missing.</a:t>
+            </a:r>
+          </a:p>
+        </p:txBody>
+      </p:sp>
+    </p:spTree>
+  </p:cSld>
+  <p:clrMapOvr>
+    <a:masterClrMapping/>
+  </p:clrMapOvr>
+</p:sld>
+</file>
+
+<file path=ppt/slides/slide22.xml><?xml version="1.0" encoding="utf-8"?>
+<p:sld xmlns:a="http://schemas.openxmlformats.org/drawingml/2006/main" xmlns:p="http://schemas.openxmlformats.org/presentationml/2006/main" xmlns:r="http://schemas.openxmlformats.org/officeDocument/2006/relationships">
+  <p:cSld>
+    <p:bg>
+      <p:bgPr>
+        <a:solidFill>
+          <a:srgbClr val="FFFFFF"/>
+        </a:solidFill>
+        <a:effectLst/>
+      </p:bgPr>
+    </p:bg>
+    <p:spTree>
+      <p:nvGrpSpPr>
+        <p:cNvPr id="1" name=""/>
+        <p:cNvGrpSpPr/>
+        <p:nvPr/>
+      </p:nvGrpSpPr>
+      <p:grpSpPr/>
+      <p:sp>
+        <p:nvSpPr>
+          <p:cNvPr id="2" name="TextBox 1"/>
+          <p:cNvSpPr txBox="1"/>
+          <p:nvPr/>
+        </p:nvSpPr>
+        <p:spPr>
+          <a:xfrm>
+            <a:off x="548640" y="274320"/>
+            <a:ext cx="11064240" cy="822960"/>
+          </a:xfrm>
+          <a:prstGeom prst="rect">
+            <a:avLst/>
+          </a:prstGeom>
+          <a:noFill/>
+        </p:spPr>
+        <p:txBody>
+          <a:bodyPr wrap="square">
+            <a:spAutoFit/>
+          </a:bodyPr>
+          <a:lstStyle/>
+          <a:p>
+            <a:r>
+              <a:rPr sz="3000" b="1" i="0">
+                <a:solidFill>
+                  <a:srgbClr val="2B6CB0"/>
+                </a:solidFill>
+                <a:latin typeface="Calibri"/>
+              </a:rPr>
+              <a:t>Practice (1-4)</a:t>
+            </a:r>
+          </a:p>
+        </p:txBody>
+      </p:sp>
+      <p:sp>
+        <p:nvSpPr>
+          <p:cNvPr id="3" name="TextBox 2"/>
+          <p:cNvSpPr txBox="1"/>
+          <p:nvPr/>
+        </p:nvSpPr>
+        <p:spPr>
+          <a:xfrm>
+            <a:off x="640080" y="1280160"/>
+            <a:ext cx="10881360" cy="5120640"/>
+          </a:xfrm>
+          <a:prstGeom prst="rect">
+            <a:avLst/>
+          </a:prstGeom>
+          <a:noFill/>
+        </p:spPr>
+        <p:txBody>
+          <a:bodyPr wrap="square">
+            <a:spAutoFit/>
+          </a:bodyPr>
+          <a:lstStyle/>
+          <a:p>
+            <a:r>
+              <a:rPr sz="2000" b="1">
+                <a:solidFill>
+                  <a:srgbClr val="222222"/>
+                </a:solidFill>
+                <a:latin typeface="Calibri"/>
+              </a:rPr>
+              <a:t>1. Describe the Waterfall methodology. (2)</a:t>
+            </a:r>
+          </a:p>
+          <a:p>
+            <a:r>
+              <a:rPr sz="2000" b="1">
+                <a:solidFill>
+                  <a:srgbClr val="222222"/>
+                </a:solidFill>
+                <a:latin typeface="Calibri"/>
+              </a:rPr>
+              <a:t>2. Explain why Agile is more suitable than Waterfall for a project whose requirements are likely to change. (3)</a:t>
+            </a:r>
+          </a:p>
+          <a:p>
+            <a:r>
+              <a:rPr sz="2000" b="1">
+                <a:solidFill>
+                  <a:srgbClr val="222222"/>
+                </a:solidFill>
+                <a:latin typeface="Calibri"/>
+              </a:rPr>
+              <a:t>3. State two features of extreme programming that go beyond standard Agile development. (2)</a:t>
+            </a:r>
+          </a:p>
+          <a:p>
+            <a:r>
+              <a:rPr sz="2000" b="1">
+                <a:solidFill>
+                  <a:srgbClr val="222222"/>
+                </a:solidFill>
+                <a:latin typeface="Calibri"/>
+              </a:rPr>
+              <a:t>4. A national space agency is developing crewed-flight control software with a very large budget; failure would be catastrophic. Justify a suitable methodology. (4)</a:t>
+            </a:r>
+          </a:p>
+        </p:txBody>
+      </p:sp>
+    </p:spTree>
+  </p:cSld>
+  <p:clrMapOvr>
+    <a:masterClrMapping/>
+  </p:clrMapOvr>
+</p:sld>
+</file>
+
+<file path=ppt/slides/slide23.xml><?xml version="1.0" encoding="utf-8"?>
+<p:sld xmlns:a="http://schemas.openxmlformats.org/drawingml/2006/main" xmlns:p="http://schemas.openxmlformats.org/presentationml/2006/main" xmlns:r="http://schemas.openxmlformats.org/officeDocument/2006/relationships">
+  <p:cSld>
+    <p:bg>
+      <p:bgPr>
+        <a:solidFill>
+          <a:srgbClr val="FFFFFF"/>
+        </a:solidFill>
+        <a:effectLst/>
+      </p:bgPr>
+    </p:bg>
+    <p:spTree>
+      <p:nvGrpSpPr>
+        <p:cNvPr id="1" name=""/>
+        <p:cNvGrpSpPr/>
+        <p:nvPr/>
+      </p:nvGrpSpPr>
+      <p:grpSpPr/>
+      <p:sp>
+        <p:nvSpPr>
+          <p:cNvPr id="2" name="TextBox 1"/>
+          <p:cNvSpPr txBox="1"/>
+          <p:nvPr/>
+        </p:nvSpPr>
+        <p:spPr>
+          <a:xfrm>
+            <a:off x="548640" y="274320"/>
+            <a:ext cx="11064240" cy="822960"/>
+          </a:xfrm>
+          <a:prstGeom prst="rect">
+            <a:avLst/>
+          </a:prstGeom>
+          <a:noFill/>
+        </p:spPr>
+        <p:txBody>
+          <a:bodyPr wrap="square">
+            <a:spAutoFit/>
+          </a:bodyPr>
+          <a:lstStyle/>
+          <a:p>
+            <a:r>
+              <a:rPr sz="3000" b="1" i="0">
+                <a:solidFill>
+                  <a:srgbClr val="2B6CB0"/>
+                </a:solidFill>
+                <a:latin typeface="Calibri"/>
+              </a:rPr>
+              <a:t>Practice — answers (1-4)</a:t>
+            </a:r>
+          </a:p>
+        </p:txBody>
+      </p:sp>
+      <p:sp>
+        <p:nvSpPr>
+          <p:cNvPr id="3" name="TextBox 2"/>
+          <p:cNvSpPr txBox="1"/>
+          <p:nvPr/>
+        </p:nvSpPr>
+        <p:spPr>
+          <a:xfrm>
+            <a:off x="640080" y="1280160"/>
+            <a:ext cx="10881360" cy="5120640"/>
+          </a:xfrm>
+          <a:prstGeom prst="rect">
+            <a:avLst/>
+          </a:prstGeom>
+          <a:noFill/>
+        </p:spPr>
+        <p:txBody>
+          <a:bodyPr wrap="square">
+            <a:spAutoFit/>
+          </a:bodyPr>
+          <a:lstStyle/>
+          <a:p>
+            <a:r>
+              <a:rPr sz="2000" b="1">
+                <a:solidFill>
+                  <a:srgbClr val="222222"/>
+                </a:solidFill>
+                <a:latin typeface="Calibri"/>
+              </a:rPr>
+              <a:t>1. Describe the Waterfall methodology. (2)</a:t>
+            </a:r>
+          </a:p>
+          <a:p>
+            <a:pPr lvl="1"/>
+            <a:r>
+              <a:rPr sz="1800" i="1">
+                <a:solidFill>
+                  <a:srgbClr val="B76E00"/>
+                </a:solidFill>
+                <a:latin typeface="Calibri"/>
+              </a:rPr>
+              <a:t>Answer: A linear, sequential methodology (1) in which each stage is fully completed and signed off before the next begins (1).</a:t>
+            </a:r>
+          </a:p>
+          <a:p>
+            <a:r>
+              <a:rPr sz="2000" b="1">
+                <a:solidFill>
+                  <a:srgbClr val="222222"/>
+                </a:solidFill>
+                <a:latin typeface="Calibri"/>
+              </a:rPr>
+              <a:t>2. Explain why Agile is more suitable than Waterfall for a project whose requirements are likely to change. (3)</a:t>
+            </a:r>
+          </a:p>
+          <a:p>
+            <a:pPr lvl="1"/>
+            <a:r>
+              <a:rPr sz="1800" i="1">
+                <a:solidFill>
+                  <a:srgbClr val="B76E00"/>
+                </a:solidFill>
+                <a:latin typeface="Calibri"/>
+              </a:rPr>
+              <a:t>Answer: Agile works in short iterations delivering working increments (1); continuous client feedback means changed requirements are built into the next cycle (1); Waterfall fixes requirements at the start and changing them means repeating earlier stages at high cost (1).</a:t>
+            </a:r>
+          </a:p>
+          <a:p>
+            <a:r>
+              <a:rPr sz="2000" b="1">
+                <a:solidFill>
+                  <a:srgbClr val="222222"/>
+                </a:solidFill>
+                <a:latin typeface="Calibri"/>
+              </a:rPr>
+              <a:t>3. State two features of extreme programming that go beyond standard Agile development. (2)</a:t>
+            </a:r>
+          </a:p>
+          <a:p>
+            <a:pPr lvl="1"/>
+            <a:r>
+              <a:rPr sz="1800" i="1">
+                <a:solidFill>
+                  <a:srgbClr val="B76E00"/>
+                </a:solidFill>
+                <a:latin typeface="Calibri"/>
+              </a:rPr>
+              <a:t>Answer: Pair programming with two developers sharing one machine (1); test-driven development where tests are written before the code, or a customer representative embedded in the team (1).</a:t>
+            </a:r>
+          </a:p>
+          <a:p>
+            <a:r>
+              <a:rPr sz="2000" b="1">
+                <a:solidFill>
+                  <a:srgbClr val="222222"/>
+                </a:solidFill>
+                <a:latin typeface="Calibri"/>
+              </a:rPr>
+              <a:t>4. A national space agency is developing crewed-flight control software with a very large budget; failure would be catastrophic. Justify a suitable methodology. (4)</a:t>
+            </a:r>
+          </a:p>
+          <a:p>
+            <a:pPr lvl="1"/>
+            <a:r>
+              <a:rPr sz="1800" i="1">
+                <a:solidFill>
+                  <a:srgbClr val="B76E00"/>
+                </a:solidFill>
+                <a:latin typeface="Calibri"/>
+              </a:rPr>
+              <a:t>Answer: Spiral (1); each loop begins with explicit risk analysis so the most dangerous problems are found and mitigated early (1); on a high-cost, safety-critical project early risk discovery prevents catastrophic late failure (1); Spiral is complex and expensive but the very large budget can absorb this trade-off (1).</a:t>
+            </a:r>
+          </a:p>
+        </p:txBody>
+      </p:sp>
+    </p:spTree>
+  </p:cSld>
+  <p:clrMapOvr>
+    <a:masterClrMapping/>
+  </p:clrMapOvr>
+</p:sld>
+</file>
+
+<file path=ppt/slides/slide24.xml><?xml version="1.0" encoding="utf-8"?>
+<p:sld xmlns:a="http://schemas.openxmlformats.org/drawingml/2006/main" xmlns:p="http://schemas.openxmlformats.org/presentationml/2006/main" xmlns:r="http://schemas.openxmlformats.org/officeDocument/2006/relationships">
+  <p:cSld>
+    <p:bg>
+      <p:bgPr>
+        <a:solidFill>
+          <a:srgbClr val="FFFFFF"/>
+        </a:solidFill>
+        <a:effectLst/>
+      </p:bgPr>
+    </p:bg>
+    <p:spTree>
+      <p:nvGrpSpPr>
+        <p:cNvPr id="1" name=""/>
+        <p:cNvGrpSpPr/>
+        <p:nvPr/>
+      </p:nvGrpSpPr>
+      <p:grpSpPr/>
+      <p:sp>
+        <p:nvSpPr>
+          <p:cNvPr id="2" name="TextBox 1"/>
+          <p:cNvSpPr txBox="1"/>
+          <p:nvPr/>
+        </p:nvSpPr>
+        <p:spPr>
+          <a:xfrm>
+            <a:off x="548640" y="274320"/>
+            <a:ext cx="11064240" cy="822960"/>
+          </a:xfrm>
+          <a:prstGeom prst="rect">
+            <a:avLst/>
+          </a:prstGeom>
+          <a:noFill/>
+        </p:spPr>
+        <p:txBody>
+          <a:bodyPr wrap="square">
+            <a:spAutoFit/>
+          </a:bodyPr>
+          <a:lstStyle/>
+          <a:p>
+            <a:r>
+              <a:rPr sz="3000" b="1" i="0">
+                <a:solidFill>
+                  <a:srgbClr val="2B6CB0"/>
+                </a:solidFill>
+                <a:latin typeface="Calibri"/>
+              </a:rPr>
+              <a:t>Practice (5-8)</a:t>
+            </a:r>
+          </a:p>
+        </p:txBody>
+      </p:sp>
+      <p:sp>
+        <p:nvSpPr>
+          <p:cNvPr id="3" name="TextBox 2"/>
+          <p:cNvSpPr txBox="1"/>
+          <p:nvPr/>
+        </p:nvSpPr>
+        <p:spPr>
+          <a:xfrm>
+            <a:off x="640080" y="1280160"/>
+            <a:ext cx="10881360" cy="5120640"/>
+          </a:xfrm>
+          <a:prstGeom prst="rect">
+            <a:avLst/>
+          </a:prstGeom>
+          <a:noFill/>
+        </p:spPr>
+        <p:txBody>
+          <a:bodyPr wrap="square">
+            <a:spAutoFit/>
+          </a:bodyPr>
+          <a:lstStyle/>
+          <a:p>
+            <a:r>
+              <a:rPr sz="2000" b="1">
+                <a:solidFill>
+                  <a:srgbClr val="222222"/>
+                </a:solidFill>
+                <a:latin typeface="Calibri"/>
+              </a:rPr>
+              <a:t>1. A program accepts ages from 18 to 65 inclusive. Give one item of normal, one of boundary and one of erroneous test data, with the expected outcome of each. (3)</a:t>
+            </a:r>
+          </a:p>
+          <a:p>
+            <a:r>
+              <a:rPr sz="2000" b="1">
+                <a:solidFill>
+                  <a:srgbClr val="222222"/>
+                </a:solidFill>
+                <a:latin typeface="Calibri"/>
+              </a:rPr>
+              <a:t>2. State the five stages of the software development lifecycle in order and name one output of the design stage. (3)</a:t>
+            </a:r>
+          </a:p>
+          <a:p>
+            <a:r>
+              <a:rPr sz="2000" b="1">
+                <a:solidFill>
+                  <a:srgbClr val="222222"/>
+                </a:solidFill>
+                <a:latin typeface="Calibri"/>
+              </a:rPr>
+              <a:t>3. Describe the difference between alpha testing and beta testing. (2)</a:t>
+            </a:r>
+          </a:p>
+          <a:p>
+            <a:r>
+              <a:rPr sz="2000" b="1">
+                <a:solidFill>
+                  <a:srgbClr val="222222"/>
+                </a:solidFill>
+                <a:latin typeface="Calibri"/>
+              </a:rPr>
+              <a:t>4. Explain one drawback of RAD for a system that must be highly robust. (2)</a:t>
+            </a:r>
+          </a:p>
+        </p:txBody>
+      </p:sp>
+    </p:spTree>
+  </p:cSld>
+  <p:clrMapOvr>
+    <a:masterClrMapping/>
+  </p:clrMapOvr>
+</p:sld>
+</file>
+
+<file path=ppt/slides/slide25.xml><?xml version="1.0" encoding="utf-8"?>
+<p:sld xmlns:a="http://schemas.openxmlformats.org/drawingml/2006/main" xmlns:p="http://schemas.openxmlformats.org/presentationml/2006/main" xmlns:r="http://schemas.openxmlformats.org/officeDocument/2006/relationships">
+  <p:cSld>
+    <p:bg>
+      <p:bgPr>
+        <a:solidFill>
+          <a:srgbClr val="FFFFFF"/>
+        </a:solidFill>
+        <a:effectLst/>
+      </p:bgPr>
+    </p:bg>
+    <p:spTree>
+      <p:nvGrpSpPr>
+        <p:cNvPr id="1" name=""/>
+        <p:cNvGrpSpPr/>
+        <p:nvPr/>
+      </p:nvGrpSpPr>
+      <p:grpSpPr/>
+      <p:sp>
+        <p:nvSpPr>
+          <p:cNvPr id="2" name="TextBox 1"/>
+          <p:cNvSpPr txBox="1"/>
+          <p:nvPr/>
+        </p:nvSpPr>
+        <p:spPr>
+          <a:xfrm>
+            <a:off x="548640" y="274320"/>
+            <a:ext cx="11064240" cy="822960"/>
+          </a:xfrm>
+          <a:prstGeom prst="rect">
+            <a:avLst/>
+          </a:prstGeom>
+          <a:noFill/>
+        </p:spPr>
+        <p:txBody>
+          <a:bodyPr wrap="square">
+            <a:spAutoFit/>
+          </a:bodyPr>
+          <a:lstStyle/>
+          <a:p>
+            <a:r>
+              <a:rPr sz="3000" b="1" i="0">
+                <a:solidFill>
+                  <a:srgbClr val="2B6CB0"/>
+                </a:solidFill>
+                <a:latin typeface="Calibri"/>
+              </a:rPr>
+              <a:t>Practice — answers (5-8)</a:t>
+            </a:r>
+          </a:p>
+        </p:txBody>
+      </p:sp>
+      <p:sp>
+        <p:nvSpPr>
+          <p:cNvPr id="3" name="TextBox 2"/>
+          <p:cNvSpPr txBox="1"/>
+          <p:nvPr/>
+        </p:nvSpPr>
+        <p:spPr>
+          <a:xfrm>
+            <a:off x="640080" y="1280160"/>
+            <a:ext cx="10881360" cy="5120640"/>
+          </a:xfrm>
+          <a:prstGeom prst="rect">
+            <a:avLst/>
+          </a:prstGeom>
+          <a:noFill/>
+        </p:spPr>
+        <p:txBody>
+          <a:bodyPr wrap="square">
+            <a:spAutoFit/>
+          </a:bodyPr>
+          <a:lstStyle/>
+          <a:p>
+            <a:r>
+              <a:rPr sz="2000" b="1">
+                <a:solidFill>
+                  <a:srgbClr val="222222"/>
+                </a:solidFill>
+                <a:latin typeface="Calibri"/>
+              </a:rPr>
+              <a:t>1. A program accepts ages from 18 to 65 inclusive. Give one item of normal, one of boundary and one of erroneous test data, with the expected outcome of each. (3)</a:t>
+            </a:r>
+          </a:p>
+          <a:p>
+            <a:pPr lvl="1"/>
+            <a:r>
+              <a:rPr sz="1800" i="1">
+                <a:solidFill>
+                  <a:srgbClr val="B76E00"/>
+                </a:solidFill>
+                <a:latin typeface="Calibri"/>
+              </a:rPr>
+              <a:t>Answer: Normal: 40, accepted (1); boundary: 18 or 65, accepted (1); erroneous: 17, 66 or text such as abc, rejected with an error message (1).</a:t>
+            </a:r>
+          </a:p>
+          <a:p>
+            <a:r>
+              <a:rPr sz="2000" b="1">
+                <a:solidFill>
+                  <a:srgbClr val="222222"/>
+                </a:solidFill>
+                <a:latin typeface="Calibri"/>
+              </a:rPr>
+              <a:t>2. State the five stages of the software development lifecycle in order and name one output of the design stage. (3)</a:t>
+            </a:r>
+          </a:p>
+          <a:p>
+            <a:pPr lvl="1"/>
+            <a:r>
+              <a:rPr sz="1800" i="1">
+                <a:solidFill>
+                  <a:srgbClr val="B76E00"/>
+                </a:solidFill>
+                <a:latin typeface="Calibri"/>
+              </a:rPr>
+              <a:t>Answer: Analysis, design, development, testing, evaluation in that order (2); design outputs include data structures, algorithms, interface designs or input and output formats (1).</a:t>
+            </a:r>
+          </a:p>
+          <a:p>
+            <a:r>
+              <a:rPr sz="2000" b="1">
+                <a:solidFill>
+                  <a:srgbClr val="222222"/>
+                </a:solidFill>
+                <a:latin typeface="Calibri"/>
+              </a:rPr>
+              <a:t>3. Describe the difference between alpha testing and beta testing. (2)</a:t>
+            </a:r>
+          </a:p>
+          <a:p>
+            <a:pPr lvl="1"/>
+            <a:r>
+              <a:rPr sz="1800" i="1">
+                <a:solidFill>
+                  <a:srgbClr val="B76E00"/>
+                </a:solidFill>
+                <a:latin typeface="Calibri"/>
+              </a:rPr>
+              <a:t>Answer: Alpha testing is carried out in-house by the developers or their team (1); beta testing releases the software to a limited group of real end users who report problems (1).</a:t>
+            </a:r>
+          </a:p>
+          <a:p>
+            <a:r>
+              <a:rPr sz="2000" b="1">
+                <a:solidFill>
+                  <a:srgbClr val="222222"/>
+                </a:solidFill>
+                <a:latin typeface="Calibri"/>
+              </a:rPr>
+              <a:t>4. Explain one drawback of RAD for a system that must be highly robust. (2)</a:t>
+            </a:r>
+          </a:p>
+          <a:p>
+            <a:pPr lvl="1"/>
+            <a:r>
+              <a:rPr sz="1800" i="1">
+                <a:solidFill>
+                  <a:srgbClr val="B76E00"/>
+                </a:solidFill>
+                <a:latin typeface="Calibri"/>
+              </a:rPr>
+              <a:t>Answer: RAD builds the product from rapidly refined prototypes (1), so the final system can be less robust and efficient than one engineered from a full design, which is unacceptable where robustness is critical (1).</a:t>
+            </a:r>
+          </a:p>
+        </p:txBody>
+      </p:sp>
+    </p:spTree>
+  </p:cSld>
+  <p:clrMapOvr>
+    <a:masterClrMapping/>
+  </p:clrMapOvr>
+</p:sld>
+</file>
+
+<file path=ppt/slides/slide26.xml><?xml version="1.0" encoding="utf-8"?>
+<p:sld xmlns:a="http://schemas.openxmlformats.org/drawingml/2006/main" xmlns:p="http://schemas.openxmlformats.org/presentationml/2006/main" xmlns:r="http://schemas.openxmlformats.org/officeDocument/2006/relationships">
+  <p:cSld>
+    <p:bg>
+      <p:bgPr>
+        <a:solidFill>
+          <a:srgbClr val="FFFFFF"/>
+        </a:solidFill>
+        <a:effectLst/>
+      </p:bgPr>
+    </p:bg>
+    <p:spTree>
+      <p:nvGrpSpPr>
+        <p:cNvPr id="1" name=""/>
+        <p:cNvGrpSpPr/>
+        <p:nvPr/>
+      </p:nvGrpSpPr>
+      <p:grpSpPr/>
+      <p:sp>
+        <p:nvSpPr>
+          <p:cNvPr id="2" name="TextBox 1"/>
+          <p:cNvSpPr txBox="1"/>
+          <p:nvPr/>
+        </p:nvSpPr>
+        <p:spPr>
+          <a:xfrm>
+            <a:off x="548640" y="274320"/>
+            <a:ext cx="11064240" cy="822960"/>
+          </a:xfrm>
+          <a:prstGeom prst="rect">
+            <a:avLst/>
+          </a:prstGeom>
+          <a:noFill/>
+        </p:spPr>
+        <p:txBody>
+          <a:bodyPr wrap="square">
+            <a:spAutoFit/>
+          </a:bodyPr>
+          <a:lstStyle/>
+          <a:p>
+            <a:r>
+              <a:rPr sz="3000" b="1" i="0">
+                <a:solidFill>
+                  <a:srgbClr val="2B6CB0"/>
+                </a:solidFill>
+                <a:latin typeface="Calibri"/>
+              </a:rPr>
+              <a:t>Common misconceptions</a:t>
+            </a:r>
+          </a:p>
+        </p:txBody>
+      </p:sp>
+      <p:sp>
+        <p:nvSpPr>
+          <p:cNvPr id="3" name="TextBox 2"/>
+          <p:cNvSpPr txBox="1"/>
+          <p:nvPr/>
+        </p:nvSpPr>
+        <p:spPr>
+          <a:xfrm>
+            <a:off x="640080" y="1280160"/>
+            <a:ext cx="10881360" cy="5120640"/>
+          </a:xfrm>
+          <a:prstGeom prst="rect">
+            <a:avLst/>
+          </a:prstGeom>
+          <a:noFill/>
+        </p:spPr>
+        <p:txBody>
+          <a:bodyPr wrap="square">
+            <a:spAutoFit/>
+          </a:bodyPr>
+          <a:lstStyle/>
+          <a:p>
+            <a:pPr/>
+            <a:r>
+              <a:rPr sz="2000" b="0">
+                <a:solidFill>
+                  <a:srgbClr val="222222"/>
+                </a:solidFill>
+                <a:latin typeface="Calibri"/>
+              </a:rPr>
+              <a:t>✗ Students often think boundary data means values just outside the range, but boundary values are the exact edges and should be accepted.</a:t>
+            </a:r>
+          </a:p>
+          <a:p>
+            <a:pPr/>
+            <a:r>
+              <a:rPr sz="2000" b="0">
+                <a:solidFill>
+                  <a:srgbClr val="222222"/>
+                </a:solidFill>
+                <a:latin typeface="Calibri"/>
+              </a:rPr>
+              <a:t>✗ Students often think Agile means no planning or documentation, but it plans every iteration and documents more lightly, not never.</a:t>
+            </a:r>
+          </a:p>
+          <a:p>
+            <a:pPr/>
+            <a:r>
+              <a:rPr sz="2000" b="0">
+                <a:solidFill>
+                  <a:srgbClr val="222222"/>
+                </a:solidFill>
+                <a:latin typeface="Calibri"/>
+              </a:rPr>
+              <a:t>✗ Students often think testing is a single stage after coding, but iterative methodologies test continuously throughout development.</a:t>
+            </a:r>
+          </a:p>
+          <a:p>
+            <a:pPr/>
+            <a:r>
+              <a:rPr sz="2000" b="0">
+                <a:solidFill>
+                  <a:srgbClr val="222222"/>
+                </a:solidFill>
+                <a:latin typeface="Calibri"/>
+              </a:rPr>
+              <a:t>✗ Students often describe a methodology instead of justifying it, but scenario questions only reward choices linked to explicit scenario clues.</a:t>
+            </a:r>
+          </a:p>
+          <a:p>
+            <a:pPr/>
+            <a:r>
+              <a:rPr sz="2000" b="0">
+                <a:solidFill>
+                  <a:srgbClr val="222222"/>
+                </a:solidFill>
+                <a:latin typeface="Calibri"/>
+              </a:rPr>
+              <a:t>✗ Students often think Spiral is just Agile with extra steps, but its defining feature is risk analysis at the start of every loop.</a:t>
+            </a:r>
+          </a:p>
+        </p:txBody>
+      </p:sp>
+    </p:spTree>
+  </p:cSld>
+  <p:clrMapOvr>
+    <a:masterClrMapping/>
+  </p:clrMapOvr>
+</p:sld>
+</file>
+
+<file path=ppt/slides/slide27.xml><?xml version="1.0" encoding="utf-8"?>
+<p:sld xmlns:a="http://schemas.openxmlformats.org/drawingml/2006/main" xmlns:p="http://schemas.openxmlformats.org/presentationml/2006/main" xmlns:r="http://schemas.openxmlformats.org/officeDocument/2006/relationships">
+  <p:cSld>
+    <p:bg>
+      <p:bgPr>
+        <a:solidFill>
+          <a:srgbClr val="FFFFFF"/>
+        </a:solidFill>
+        <a:effectLst/>
+      </p:bgPr>
+    </p:bg>
+    <p:spTree>
+      <p:nvGrpSpPr>
+        <p:cNvPr id="1" name=""/>
+        <p:cNvGrpSpPr/>
+        <p:nvPr/>
+      </p:nvGrpSpPr>
+      <p:grpSpPr/>
+      <p:sp>
+        <p:nvSpPr>
+          <p:cNvPr id="2" name="TextBox 1"/>
+          <p:cNvSpPr txBox="1"/>
+          <p:nvPr/>
+        </p:nvSpPr>
+        <p:spPr>
+          <a:xfrm>
+            <a:off x="548640" y="274320"/>
+            <a:ext cx="11064240" cy="822960"/>
+          </a:xfrm>
+          <a:prstGeom prst="rect">
+            <a:avLst/>
+          </a:prstGeom>
+          <a:noFill/>
+        </p:spPr>
+        <p:txBody>
+          <a:bodyPr wrap="square">
+            <a:spAutoFit/>
+          </a:bodyPr>
+          <a:lstStyle/>
+          <a:p>
+            <a:r>
+              <a:rPr sz="3000" b="1" i="0">
+                <a:solidFill>
+                  <a:srgbClr val="2B6CB0"/>
+                </a:solidFill>
+                <a:latin typeface="Calibri"/>
+              </a:rPr>
+              <a:t>How the exam asks this</a:t>
+            </a:r>
+          </a:p>
+        </p:txBody>
+      </p:sp>
+      <p:sp>
+        <p:nvSpPr>
+          <p:cNvPr id="3" name="TextBox 2"/>
+          <p:cNvSpPr txBox="1"/>
+          <p:nvPr/>
+        </p:nvSpPr>
+        <p:spPr>
+          <a:xfrm>
+            <a:off x="640080" y="1280160"/>
+            <a:ext cx="10881360" cy="5120640"/>
+          </a:xfrm>
+          <a:prstGeom prst="rect">
+            <a:avLst/>
+          </a:prstGeom>
+          <a:noFill/>
+        </p:spPr>
+        <p:txBody>
+          <a:bodyPr wrap="square">
+            <a:spAutoFit/>
+          </a:bodyPr>
+          <a:lstStyle/>
+          <a:p>
+            <a:pPr/>
+            <a:r>
+              <a:rPr sz="2000" b="0">
+                <a:solidFill>
+                  <a:srgbClr val="222222"/>
+                </a:solidFill>
+                <a:latin typeface="Calibri"/>
+              </a:rPr>
+              <a:t>Command words: state and describe for 2 to 3 mark definitions; explain, compare and justify for applied questions.</a:t>
+            </a:r>
+          </a:p>
+          <a:p>
+            <a:pPr/>
+            <a:r>
+              <a:rPr sz="2000" b="0">
+                <a:solidFill>
+                  <a:srgbClr val="222222"/>
+                </a:solidFill>
+                <a:latin typeface="Calibri"/>
+              </a:rPr>
+              <a:t>Methodology choice questions run to 4 to 9 marks; the 9 mark extended response is levelled on AO3 justification quality.</a:t>
+            </a:r>
+          </a:p>
+          <a:p>
+            <a:pPr/>
+            <a:r>
+              <a:rPr sz="2000" b="0">
+                <a:solidFill>
+                  <a:srgbClr val="222222"/>
+                </a:solidFill>
+                <a:latin typeface="Calibri"/>
+              </a:rPr>
+              <a:t>Test data questions typically give a validation rule and ask for the three categories with expected outcomes, 3 to 6 marks.</a:t>
+            </a:r>
+          </a:p>
+          <a:p>
+            <a:pPr/>
+            <a:r>
+              <a:rPr sz="2000" b="0">
+                <a:solidFill>
+                  <a:srgbClr val="222222"/>
+                </a:solidFill>
+                <a:latin typeface="Calibri"/>
+              </a:rPr>
+              <a:t>Example stem: A small company is developing software for a client who is unsure of their requirements. Discuss which methodology the company should use. (9)</a:t>
+            </a:r>
+          </a:p>
+        </p:txBody>
+      </p:sp>
+    </p:spTree>
+  </p:cSld>
+  <p:clrMapOvr>
+    <a:masterClrMapping/>
+  </p:clrMapOvr>
+</p:sld>
+</file>
+
+<file path=ppt/slides/slide28.xml><?xml version="1.0" encoding="utf-8"?>
+<p:sld xmlns:a="http://schemas.openxmlformats.org/drawingml/2006/main" xmlns:p="http://schemas.openxmlformats.org/presentationml/2006/main" xmlns:r="http://schemas.openxmlformats.org/officeDocument/2006/relationships">
+  <p:cSld>
+    <p:bg>
+      <p:bgPr>
+        <a:solidFill>
+          <a:srgbClr val="FFFFFF"/>
+        </a:solidFill>
+        <a:effectLst/>
+      </p:bgPr>
+    </p:bg>
+    <p:spTree>
+      <p:nvGrpSpPr>
+        <p:cNvPr id="1" name=""/>
+        <p:cNvGrpSpPr/>
+        <p:nvPr/>
+      </p:nvGrpSpPr>
+      <p:grpSpPr/>
+      <p:sp>
+        <p:nvSpPr>
+          <p:cNvPr id="2" name="TextBox 1"/>
+          <p:cNvSpPr txBox="1"/>
+          <p:nvPr/>
+        </p:nvSpPr>
+        <p:spPr>
+          <a:xfrm>
+            <a:off x="548640" y="274320"/>
+            <a:ext cx="11064240" cy="822960"/>
+          </a:xfrm>
+          <a:prstGeom prst="rect">
+            <a:avLst/>
+          </a:prstGeom>
+          <a:noFill/>
+        </p:spPr>
+        <p:txBody>
+          <a:bodyPr wrap="square">
+            <a:spAutoFit/>
+          </a:bodyPr>
+          <a:lstStyle/>
+          <a:p>
+            <a:r>
+              <a:rPr sz="3000" b="1" i="0">
+                <a:solidFill>
+                  <a:srgbClr val="2B6CB0"/>
+                </a:solidFill>
+                <a:latin typeface="Calibri"/>
+              </a:rPr>
+              <a:t>Your turn</a:t>
+            </a:r>
+          </a:p>
+        </p:txBody>
+      </p:sp>
+      <p:sp>
+        <p:nvSpPr>
+          <p:cNvPr id="3" name="TextBox 2"/>
+          <p:cNvSpPr txBox="1"/>
+          <p:nvPr/>
+        </p:nvSpPr>
+        <p:spPr>
+          <a:xfrm>
+            <a:off x="640080" y="1280160"/>
+            <a:ext cx="10881360" cy="5120640"/>
+          </a:xfrm>
+          <a:prstGeom prst="rect">
+            <a:avLst/>
+          </a:prstGeom>
+          <a:noFill/>
+        </p:spPr>
+        <p:txBody>
+          <a:bodyPr wrap="square">
+            <a:spAutoFit/>
+          </a:bodyPr>
+          <a:lstStyle/>
+          <a:p>
+            <a:pPr/>
+            <a:r>
+              <a:rPr sz="2400" b="1">
+                <a:solidFill>
+                  <a:srgbClr val="2B6CB0"/>
+                </a:solidFill>
+                <a:latin typeface="Calibri"/>
+              </a:rPr>
+              <a:t>Task</a:t>
+            </a:r>
+          </a:p>
+          <a:p>
+            <a:pPr lvl="1"/>
+            <a:r>
+              <a:rPr sz="2200" b="0">
+                <a:solidFill>
+                  <a:srgbClr val="222222"/>
+                </a:solidFill>
+                <a:latin typeface="Calibri"/>
+              </a:rPr>
+              <a:t>Create a one-page revision table for the five methodologies: key idea, one merit, one drawback, the tell-tale scenario clue, and one scenario each suits.</a:t>
+            </a:r>
+          </a:p>
+          <a:p>
+            <a:r>
+              <a:rPr sz="2400" b="1">
+                <a:solidFill>
+                  <a:srgbClr val="B76E00"/>
+                </a:solidFill>
+                <a:latin typeface="Calibri"/>
+              </a:rPr>
+              <a:t>Challenge / stretch</a:t>
+            </a:r>
+          </a:p>
+          <a:p>
+            <a:pPr lvl="1"/>
+            <a:r>
+              <a:rPr sz="2200" b="0">
+                <a:solidFill>
+                  <a:srgbClr val="222222"/>
+                </a:solidFill>
+                <a:latin typeface="Calibri"/>
+              </a:rPr>
+              <a:t>A startup is building a brand-new mobile app: requirements are unclear and expected to change, the budget is modest and the team is small but skilled. Recommend a methodology with at least three explicit links to these clues, explain why Waterfall is unsuitable, and design a five-row test plan for the app's age field accepting 13 to 120 inclusive.</a:t>
+            </a:r>
+          </a:p>
+        </p:txBody>
+      </p:sp>
+    </p:spTree>
+  </p:cSld>
+  <p:clrMapOvr>
+    <a:masterClrMapping/>
+  </p:clrMapOvr>
+</p:sld>
+</file>
+
+<file path=ppt/slides/slide29.xml><?xml version="1.0" encoding="utf-8"?>
+<p:sld xmlns:a="http://schemas.openxmlformats.org/drawingml/2006/main" xmlns:p="http://schemas.openxmlformats.org/presentationml/2006/main" xmlns:r="http://schemas.openxmlformats.org/officeDocument/2006/relationships">
+  <p:cSld>
+    <p:bg>
+      <p:bgPr>
+        <a:solidFill>
+          <a:srgbClr val="FFFFFF"/>
+        </a:solidFill>
+        <a:effectLst/>
+      </p:bgPr>
+    </p:bg>
+    <p:spTree>
+      <p:nvGrpSpPr>
+        <p:cNvPr id="1" name=""/>
+        <p:cNvGrpSpPr/>
+        <p:nvPr/>
+      </p:nvGrpSpPr>
+      <p:grpSpPr/>
+      <p:sp>
+        <p:nvSpPr>
+          <p:cNvPr id="2" name="TextBox 1"/>
+          <p:cNvSpPr txBox="1"/>
+          <p:nvPr/>
+        </p:nvSpPr>
+        <p:spPr>
+          <a:xfrm>
+            <a:off x="548640" y="274320"/>
+            <a:ext cx="11064240" cy="822960"/>
+          </a:xfrm>
+          <a:prstGeom prst="rect">
+            <a:avLst/>
+          </a:prstGeom>
+          <a:noFill/>
+        </p:spPr>
+        <p:txBody>
+          <a:bodyPr wrap="square">
+            <a:spAutoFit/>
+          </a:bodyPr>
+          <a:lstStyle/>
+          <a:p>
+            <a:r>
+              <a:rPr sz="3000" b="1" i="0">
+                <a:solidFill>
+                  <a:srgbClr val="2B6CB0"/>
+                </a:solidFill>
+                <a:latin typeface="Calibri"/>
+              </a:rPr>
+              <a:t>Exit ticket</a:t>
+            </a:r>
+          </a:p>
+        </p:txBody>
+      </p:sp>
+      <p:sp>
+        <p:nvSpPr>
+          <p:cNvPr id="3" name="TextBox 2"/>
+          <p:cNvSpPr txBox="1"/>
+          <p:nvPr/>
+        </p:nvSpPr>
+        <p:spPr>
+          <a:xfrm>
+            <a:off x="640080" y="1280160"/>
+            <a:ext cx="10881360" cy="5120640"/>
+          </a:xfrm>
+          <a:prstGeom prst="rect">
+            <a:avLst/>
+          </a:prstGeom>
+          <a:noFill/>
+        </p:spPr>
+        <p:txBody>
+          <a:bodyPr wrap="square">
+            <a:spAutoFit/>
+          </a:bodyPr>
+          <a:lstStyle/>
+          <a:p>
+            <a:r>
+              <a:rPr sz="2200" b="1">
+                <a:solidFill>
+                  <a:srgbClr val="222222"/>
+                </a:solidFill>
+                <a:latin typeface="Calibri"/>
+              </a:rPr>
+              <a:t>1. Name the three categories of test data and give an example of each for a range of 1 to 100 inclusive.</a:t>
+            </a:r>
+          </a:p>
+          <a:p>
+            <a:r>
+              <a:rPr sz="2200" b="1">
+                <a:solidFill>
+                  <a:srgbClr val="222222"/>
+                </a:solidFill>
+                <a:latin typeface="Calibri"/>
+              </a:rPr>
+              <a:t>2. Give one merit and one drawback of Waterfall.</a:t>
+            </a:r>
+          </a:p>
+          <a:p>
+            <a:r>
+              <a:rPr sz="2200" b="1">
+                <a:solidFill>
+                  <a:srgbClr val="222222"/>
+                </a:solidFill>
+                <a:latin typeface="Calibri"/>
+              </a:rPr>
+              <a:t>3. Which methodology puts risk analysis at the centre of every loop, and what kind of project suits it?</a:t>
             </a:r>
           </a:p>
         </p:txBody>
@@ -3983,7 +6491,7 @@
                 </a:solidFill>
                 <a:latin typeface="Calibri"/>
               </a:rPr>
-              <a:t>2. What is the difference between application and utility software?</a:t>
+              <a:t>2. Give two differences between a compiler and an interpreter.</a:t>
             </a:r>
           </a:p>
           <a:p>
@@ -3994,7 +6502,7 @@
                 </a:solidFill>
                 <a:latin typeface="Calibri"/>
               </a:rPr>
-              <a:t>3. Which methodology is linear and completes one stage before the next?</a:t>
+              <a:t>3. What does an assembler translate, and into what?</a:t>
             </a:r>
           </a:p>
           <a:p>
@@ -4005,7 +6513,7 @@
                 </a:solidFill>
                 <a:latin typeface="Calibri"/>
               </a:rPr>
-              <a:t>4. What is the defining feature of Agile?</a:t>
+              <a:t>4. Name two schedulers an operating system might use and one difference between them.</a:t>
             </a:r>
           </a:p>
           <a:p>
@@ -4016,7 +6524,159 @@
                 </a:solidFill>
                 <a:latin typeface="Calibri"/>
               </a:rPr>
-              <a:t>5. During which lifecycle stage are requirements gathered and feasibility assessed?</a:t>
+              <a:t>5. What happens when an interrupt with higher priority than the current process is received?</a:t>
+            </a:r>
+          </a:p>
+        </p:txBody>
+      </p:sp>
+    </p:spTree>
+  </p:cSld>
+  <p:clrMapOvr>
+    <a:masterClrMapping/>
+  </p:clrMapOvr>
+</p:sld>
+</file>
+
+<file path=ppt/slides/slide30.xml><?xml version="1.0" encoding="utf-8"?>
+<p:sld xmlns:a="http://schemas.openxmlformats.org/drawingml/2006/main" xmlns:p="http://schemas.openxmlformats.org/presentationml/2006/main" xmlns:r="http://schemas.openxmlformats.org/officeDocument/2006/relationships">
+  <p:cSld>
+    <p:bg>
+      <p:bgPr>
+        <a:solidFill>
+          <a:srgbClr val="FFFFFF"/>
+        </a:solidFill>
+        <a:effectLst/>
+      </p:bgPr>
+    </p:bg>
+    <p:spTree>
+      <p:nvGrpSpPr>
+        <p:cNvPr id="1" name=""/>
+        <p:cNvGrpSpPr/>
+        <p:nvPr/>
+      </p:nvGrpSpPr>
+      <p:grpSpPr/>
+      <p:sp>
+        <p:nvSpPr>
+          <p:cNvPr id="2" name="TextBox 1"/>
+          <p:cNvSpPr txBox="1"/>
+          <p:nvPr/>
+        </p:nvSpPr>
+        <p:spPr>
+          <a:xfrm>
+            <a:off x="548640" y="274320"/>
+            <a:ext cx="11064240" cy="822960"/>
+          </a:xfrm>
+          <a:prstGeom prst="rect">
+            <a:avLst/>
+          </a:prstGeom>
+          <a:noFill/>
+        </p:spPr>
+        <p:txBody>
+          <a:bodyPr wrap="square">
+            <a:spAutoFit/>
+          </a:bodyPr>
+          <a:lstStyle/>
+          <a:p>
+            <a:r>
+              <a:rPr sz="3000" b="1" i="0">
+                <a:solidFill>
+                  <a:srgbClr val="2B6CB0"/>
+                </a:solidFill>
+                <a:latin typeface="Calibri"/>
+              </a:rPr>
+              <a:t>Exit ticket — answers</a:t>
+            </a:r>
+          </a:p>
+        </p:txBody>
+      </p:sp>
+      <p:sp>
+        <p:nvSpPr>
+          <p:cNvPr id="3" name="TextBox 2"/>
+          <p:cNvSpPr txBox="1"/>
+          <p:nvPr/>
+        </p:nvSpPr>
+        <p:spPr>
+          <a:xfrm>
+            <a:off x="640080" y="1280160"/>
+            <a:ext cx="10881360" cy="5120640"/>
+          </a:xfrm>
+          <a:prstGeom prst="rect">
+            <a:avLst/>
+          </a:prstGeom>
+          <a:noFill/>
+        </p:spPr>
+        <p:txBody>
+          <a:bodyPr wrap="square">
+            <a:spAutoFit/>
+          </a:bodyPr>
+          <a:lstStyle/>
+          <a:p>
+            <a:r>
+              <a:rPr sz="2200" b="1">
+                <a:solidFill>
+                  <a:srgbClr val="222222"/>
+                </a:solidFill>
+                <a:latin typeface="Calibri"/>
+              </a:rPr>
+              <a:t>1. Name the three categories of test data and give an example of each for a range of 1 to 100 inclusive.</a:t>
+            </a:r>
+          </a:p>
+          <a:p>
+            <a:pPr lvl="1"/>
+            <a:r>
+              <a:rPr sz="1800" i="1">
+                <a:solidFill>
+                  <a:srgbClr val="B76E00"/>
+                </a:solidFill>
+                <a:latin typeface="Calibri"/>
+              </a:rPr>
+              <a:t>Answer: Normal, for example 50; boundary, for example 1 or 100; erroneous, for example 0, 101 or text such as abc.</a:t>
+            </a:r>
+          </a:p>
+          <a:p>
+            <a:r>
+              <a:rPr sz="2200" b="1">
+                <a:solidFill>
+                  <a:srgbClr val="222222"/>
+                </a:solidFill>
+                <a:latin typeface="Calibri"/>
+              </a:rPr>
+              <a:t>2. Give one merit and one drawback of Waterfall.</a:t>
+            </a:r>
+          </a:p>
+          <a:p>
+            <a:pPr lvl="1"/>
+            <a:r>
+              <a:rPr sz="1800" i="1">
+                <a:solidFill>
+                  <a:srgbClr val="B76E00"/>
+                </a:solidFill>
+                <a:latin typeface="Calibri"/>
+              </a:rPr>
+              <a:t>Answer: Merit: simple, well documented with clear milestones; drawback: inflexible and the client only sees the product at the end.</a:t>
+            </a:r>
+          </a:p>
+          <a:p>
+            <a:r>
+              <a:rPr sz="2200" b="1">
+                <a:solidFill>
+                  <a:srgbClr val="222222"/>
+                </a:solidFill>
+                <a:latin typeface="Calibri"/>
+              </a:rPr>
+              <a:t>3. Which methodology puts risk analysis at the centre of every loop, and what kind of project suits it?</a:t>
+            </a:r>
+          </a:p>
+          <a:p>
+            <a:pPr lvl="1"/>
+            <a:r>
+              <a:rPr sz="1800" i="1">
+                <a:solidFill>
+                  <a:srgbClr val="B76E00"/>
+                </a:solidFill>
+                <a:latin typeface="Calibri"/>
+              </a:rPr>
+              <a:t>Answer: Spiral; large, expensive, high-risk projects where failure would be very costly.</a:t>
             </a:r>
           </a:p>
         </p:txBody>
@@ -4122,7 +6782,7 @@
                 </a:solidFill>
                 <a:latin typeface="Calibri"/>
               </a:rPr>
-              <a:t>Answer: Lexical analysis, syntax analysis, code generation, code optimisation (interleaving 1.2.2).</a:t>
+              <a:t>Answer: Lexical analysis, syntax analysis, code generation, code optimisation (1.2.2).</a:t>
             </a:r>
           </a:p>
           <a:p>
@@ -4133,7 +6793,7 @@
                 </a:solidFill>
                 <a:latin typeface="Calibri"/>
               </a:rPr>
-              <a:t>2. What is the difference between application and utility software?</a:t>
+              <a:t>2. Give two differences between a compiler and an interpreter.</a:t>
             </a:r>
           </a:p>
           <a:p>
@@ -4145,7 +6805,7 @@
                 </a:solidFill>
                 <a:latin typeface="Calibri"/>
               </a:rPr>
-              <a:t>Answer: Application software performs a real-world user task; utility software maintains or optimises the computer itself (interleaving 1.2.2).</a:t>
+              <a:t>Answer: Compiler translates the whole program before running and produces an executable; interpreter translates line by line at run time and stops at the first error (1.2.2).</a:t>
             </a:r>
           </a:p>
           <a:p>
@@ -4156,7 +6816,7 @@
                 </a:solidFill>
                 <a:latin typeface="Calibri"/>
               </a:rPr>
-              <a:t>3. Which methodology is linear and completes one stage before the next?</a:t>
+              <a:t>3. What does an assembler translate, and into what?</a:t>
             </a:r>
           </a:p>
           <a:p>
@@ -4168,7 +6828,7 @@
                 </a:solidFill>
                 <a:latin typeface="Calibri"/>
               </a:rPr>
-              <a:t>Answer: Waterfall.</a:t>
+              <a:t>Answer: Assembly language mnemonics into machine code, roughly one to one (1.2.2).</a:t>
             </a:r>
           </a:p>
           <a:p>
@@ -4179,7 +6839,7 @@
                 </a:solidFill>
                 <a:latin typeface="Calibri"/>
               </a:rPr>
-              <a:t>4. What is the defining feature of Agile?</a:t>
+              <a:t>4. Name two schedulers an operating system might use and one difference between them.</a:t>
             </a:r>
           </a:p>
           <a:p>
@@ -4191,7 +6851,7 @@
                 </a:solidFill>
                 <a:latin typeface="Calibri"/>
               </a:rPr>
-              <a:t>Answer: Iterative increments with continuous client feedback so changing requirements can be absorbed.</a:t>
+              <a:t>Answer: Examples: round robin gives each process a fixed time slice pre-emptively; first come first served runs each job to completion, non pre-emptively (1.2.1).</a:t>
             </a:r>
           </a:p>
           <a:p>
@@ -4202,7 +6862,7 @@
                 </a:solidFill>
                 <a:latin typeface="Calibri"/>
               </a:rPr>
-              <a:t>5. During which lifecycle stage are requirements gathered and feasibility assessed?</a:t>
+              <a:t>5. What happens when an interrupt with higher priority than the current process is received?</a:t>
             </a:r>
           </a:p>
           <a:p>
@@ -4214,7 +6874,7 @@
                 </a:solidFill>
                 <a:latin typeface="Calibri"/>
               </a:rPr>
-              <a:t>Answer: Analysis.</a:t>
+              <a:t>Answer: At the end of the current fetch-decode-execute cycle the processor pushes its registers onto the stack, loads and runs the interrupt service routine, then pops the registers and resumes (1.2.1).</a:t>
             </a:r>
           </a:p>
         </p:txBody>
@@ -4338,7 +6998,7 @@
                 </a:solidFill>
                 <a:latin typeface="Calibri"/>
               </a:rPr>
-              <a:t> — An iterative methodology delivering increments with continuous client feedback; suits changing requirements.</a:t>
+              <a:t> — An iterative methodology delivering working increments with continuous client feedback; suits changing requirements.</a:t>
             </a:r>
           </a:p>
           <a:p>
@@ -4358,7 +7018,7 @@
                 </a:solidFill>
                 <a:latin typeface="Calibri"/>
               </a:rPr>
-              <a:t> — An Agile variant adding pair programming, constant test-driven development and a customer in the team.</a:t>
+              <a:t> — An Agile variant adding pair programming, constant test-driven development and a customer embedded in the team.</a:t>
             </a:r>
           </a:p>
           <a:p>
@@ -4378,7 +7038,7 @@
                 </a:solidFill>
                 <a:latin typeface="Calibri"/>
               </a:rPr>
-              <a:t> — An iterative methodology with central risk analysis each loop; suits large, expensive, high-risk projects.</a:t>
+              <a:t> — An iterative methodology with risk analysis at the centre of each loop; suits large, expensive, high-risk projects.</a:t>
             </a:r>
           </a:p>
           <a:p>
@@ -4398,7 +7058,7 @@
                 </a:solidFill>
                 <a:latin typeface="Calibri"/>
               </a:rPr>
-              <a:t> — Rapid application development using prototyping refined by user feedback; suits fast delivery or vague requirements.</a:t>
+              <a:t> — Rapid application development: prototypes refined by user feedback; suits fast delivery or vague requirements.</a:t>
             </a:r>
           </a:p>
           <a:p>
@@ -4429,6 +7089,26 @@
                 </a:solidFill>
                 <a:latin typeface="Calibri"/>
               </a:rPr>
+              <a:t>Normal data</a:t>
+            </a:r>
+            <a:r>
+              <a:rPr sz="1800">
+                <a:solidFill>
+                  <a:srgbClr val="222222"/>
+                </a:solidFill>
+                <a:latin typeface="Calibri"/>
+              </a:rPr>
+              <a:t> — Typical in-range test values that the program should accept and process correctly.</a:t>
+            </a:r>
+          </a:p>
+          <a:p>
+            <a:r>
+              <a:rPr b="1" sz="2000">
+                <a:solidFill>
+                  <a:srgbClr val="1A365D"/>
+                </a:solidFill>
+                <a:latin typeface="Calibri"/>
+              </a:rPr>
               <a:t>Boundary data</a:t>
             </a:r>
             <a:r>
@@ -4438,7 +7118,7 @@
                 </a:solidFill>
                 <a:latin typeface="Calibri"/>
               </a:rPr>
-              <a:t> — Test values at the edges of the acceptable range.</a:t>
+              <a:t> — Test values at the exact edges of the acceptable range, which should still be accepted.</a:t>
             </a:r>
           </a:p>
           <a:p>
@@ -4449,7 +7129,7 @@
                 </a:solidFill>
                 <a:latin typeface="Calibri"/>
               </a:rPr>
-              <a:t>Evaluation</a:t>
+              <a:t>Erroneous data</a:t>
             </a:r>
             <a:r>
               <a:rPr sz="1800">
@@ -4458,7 +7138,7 @@
                 </a:solidFill>
                 <a:latin typeface="Calibri"/>
               </a:rPr>
-              <a:t> — Judging the finished system against the original requirements: effective, usable, robust, maintainable.</a:t>
+              <a:t> — Invalid test values outside the acceptable range, which the program should reject gracefully.</a:t>
             </a:r>
           </a:p>
         </p:txBody>
@@ -4518,7 +7198,7 @@
                 </a:solidFill>
                 <a:latin typeface="Calibri"/>
               </a:rPr>
-              <a:t>Methodologies overview</a:t>
+              <a:t>The software development lifecycle</a:t>
             </a:r>
           </a:p>
         </p:txBody>
@@ -4547,49 +7227,61 @@
           <a:p>
             <a:pPr/>
             <a:r>
-              <a:rPr sz="2200" b="0">
-                <a:solidFill>
-                  <a:srgbClr val="222222"/>
-                </a:solidFill>
-                <a:latin typeface="Calibri"/>
-              </a:rPr>
-              <a:t>Waterfall is linear and sequential, one stage at a time, best when requirements are fixed and clear.</a:t>
+              <a:rPr sz="2000" b="0">
+                <a:solidFill>
+                  <a:srgbClr val="222222"/>
+                </a:solidFill>
+                <a:latin typeface="Calibri"/>
+              </a:rPr>
+              <a:t>Every methodology organises the same stages: analysis, design, development, testing, evaluation.</a:t>
             </a:r>
           </a:p>
           <a:p>
             <a:pPr/>
             <a:r>
-              <a:rPr sz="2200" b="0">
-                <a:solidFill>
-                  <a:srgbClr val="222222"/>
-                </a:solidFill>
-                <a:latin typeface="Calibri"/>
-              </a:rPr>
-              <a:t>Agile delivers iterative increments with continuous client feedback, best when requirements may change.</a:t>
+              <a:rPr sz="2000" b="0">
+                <a:solidFill>
+                  <a:srgbClr val="222222"/>
+                </a:solidFill>
+                <a:latin typeface="Calibri"/>
+              </a:rPr>
+              <a:t>Analysis investigates the problem, gathers requirements from stakeholders and assesses feasibility.</a:t>
             </a:r>
           </a:p>
           <a:p>
             <a:pPr/>
             <a:r>
-              <a:rPr sz="2200" b="0">
-                <a:solidFill>
-                  <a:srgbClr val="222222"/>
-                </a:solidFill>
-                <a:latin typeface="Calibri"/>
-              </a:rPr>
-              <a:t>Extreme programming adds pair programming, constant test-driven development and a customer in the team for high code quality.</a:t>
+              <a:rPr sz="2000" b="0">
+                <a:solidFill>
+                  <a:srgbClr val="222222"/>
+                </a:solidFill>
+                <a:latin typeface="Calibri"/>
+              </a:rPr>
+              <a:t>Design plans data structures, algorithms, the user interface and input, output and file formats.</a:t>
             </a:r>
           </a:p>
           <a:p>
             <a:pPr/>
             <a:r>
-              <a:rPr sz="2200" b="0">
-                <a:solidFill>
-                  <a:srgbClr val="222222"/>
-                </a:solidFill>
-                <a:latin typeface="Calibri"/>
-              </a:rPr>
-              <a:t>Spiral centres on risk analysis each loop (large, high-risk projects); RAD centres on rapid prototyping (fast or vague projects).</a:t>
+              <a:rPr sz="2000" b="0">
+                <a:solidFill>
+                  <a:srgbClr val="222222"/>
+                </a:solidFill>
+                <a:latin typeface="Calibri"/>
+              </a:rPr>
+              <a:t>Development writes the code in modules; testing and evaluation judge it against the requirements.</a:t>
+            </a:r>
+          </a:p>
+          <a:p>
+            <a:pPr/>
+            <a:r>
+              <a:rPr sz="1800" b="1">
+                <a:solidFill>
+                  <a:srgbClr val="B76E00"/>
+                </a:solidFill>
+                <a:latin typeface="Calibri"/>
+              </a:rPr>
+              <a:t>Learn the stages in order with one named output each: examiners reward stage-specific detail.</a:t>
             </a:r>
           </a:p>
         </p:txBody>
@@ -4649,7 +7341,7 @@
                 </a:solidFill>
                 <a:latin typeface="Calibri"/>
               </a:rPr>
-              <a:t>Trade-offs</a:t>
+              <a:t>Waterfall</a:t>
             </a:r>
           </a:p>
         </p:txBody>
@@ -4678,49 +7370,61 @@
           <a:p>
             <a:pPr/>
             <a:r>
-              <a:rPr sz="2200" b="0">
-                <a:solidFill>
-                  <a:srgbClr val="222222"/>
-                </a:solidFill>
-                <a:latin typeface="Calibri"/>
-              </a:rPr>
-              <a:t>Waterfall is simple and well documented but inflexible, with the client only seeing the product at the end.</a:t>
+              <a:rPr sz="2000" b="0">
+                <a:solidFill>
+                  <a:srgbClr val="222222"/>
+                </a:solidFill>
+                <a:latin typeface="Calibri"/>
+              </a:rPr>
+              <a:t>Linear and sequential: each stage is fully completed and signed off before the next begins.</a:t>
             </a:r>
           </a:p>
           <a:p>
             <a:pPr/>
             <a:r>
-              <a:rPr sz="2200" b="0">
-                <a:solidFill>
-                  <a:srgbClr val="222222"/>
-                </a:solidFill>
-                <a:latin typeface="Calibri"/>
-              </a:rPr>
-              <a:t>Agile is flexible but produces less documentation and makes cost and time hard to predict.</a:t>
+              <a:rPr sz="2000" b="0">
+                <a:solidFill>
+                  <a:srgbClr val="222222"/>
+                </a:solidFill>
+                <a:latin typeface="Calibri"/>
+              </a:rPr>
+              <a:t>Merits: simple to manage, clear milestones, thorough documentation at every stage.</a:t>
             </a:r>
           </a:p>
           <a:p>
             <a:pPr/>
             <a:r>
-              <a:rPr sz="2200" b="0">
-                <a:solidFill>
-                  <a:srgbClr val="222222"/>
-                </a:solidFill>
-                <a:latin typeface="Calibri"/>
-              </a:rPr>
-              <a:t>XP gives very high quality but is staff-intensive; Spiral manages risk but is expensive and complex.</a:t>
+              <a:rPr sz="2000" b="0">
+                <a:solidFill>
+                  <a:srgbClr val="222222"/>
+                </a:solidFill>
+                <a:latin typeface="Calibri"/>
+              </a:rPr>
+              <a:t>Drawbacks: inflexible; changing requirements means going back up the waterfall, which is costly.</a:t>
             </a:r>
           </a:p>
           <a:p>
             <a:pPr/>
             <a:r>
-              <a:rPr sz="2200" b="0">
-                <a:solidFill>
-                  <a:srgbClr val="222222"/>
-                </a:solidFill>
-                <a:latin typeface="Calibri"/>
-              </a:rPr>
-              <a:t>RAD is fast but needs skilled developers and committed users and can be less robust.</a:t>
+              <a:rPr sz="2000" b="0">
+                <a:solidFill>
+                  <a:srgbClr val="222222"/>
+                </a:solidFill>
+                <a:latin typeface="Calibri"/>
+              </a:rPr>
+              <a:t>The client only sees the finished product at the end, so misunderstandings surface late.</a:t>
+            </a:r>
+          </a:p>
+          <a:p>
+            <a:pPr/>
+            <a:r>
+              <a:rPr sz="2000" b="0">
+                <a:solidFill>
+                  <a:srgbClr val="222222"/>
+                </a:solidFill>
+                <a:latin typeface="Calibri"/>
+              </a:rPr>
+              <a:t>Best when requirements are fixed, clear and unlikely to change, such as contractual work.</a:t>
             </a:r>
           </a:p>
         </p:txBody>
@@ -4780,7 +7484,7 @@
                 </a:solidFill>
                 <a:latin typeface="Calibri"/>
               </a:rPr>
-              <a:t>Lifecycle stages</a:t>
+              <a:t>Agile</a:t>
             </a:r>
           </a:p>
         </p:txBody>
@@ -4809,49 +7513,61 @@
           <a:p>
             <a:pPr/>
             <a:r>
-              <a:rPr sz="2200" b="0">
-                <a:solidFill>
-                  <a:srgbClr val="222222"/>
-                </a:solidFill>
-                <a:latin typeface="Calibri"/>
-              </a:rPr>
-              <a:t>Analysis: investigate the problem, gather requirements and assess feasibility.</a:t>
+              <a:rPr sz="2000" b="0">
+                <a:solidFill>
+                  <a:srgbClr val="222222"/>
+                </a:solidFill>
+                <a:latin typeface="Calibri"/>
+              </a:rPr>
+              <a:t>Develops the product in short iterations, each delivering a working increment.</a:t>
             </a:r>
           </a:p>
           <a:p>
             <a:pPr/>
             <a:r>
-              <a:rPr sz="2200" b="0">
-                <a:solidFill>
-                  <a:srgbClr val="222222"/>
-                </a:solidFill>
-                <a:latin typeface="Calibri"/>
-              </a:rPr>
-              <a:t>Design: plan data structures, algorithms, the interface and the inputs/outputs and data formats.</a:t>
+              <a:rPr sz="2000" b="0">
+                <a:solidFill>
+                  <a:srgbClr val="222222"/>
+                </a:solidFill>
+                <a:latin typeface="Calibri"/>
+              </a:rPr>
+              <a:t>Continuous client feedback shapes the next iteration, so changing requirements are absorbed cheaply.</a:t>
             </a:r>
           </a:p>
           <a:p>
             <a:pPr/>
             <a:r>
-              <a:rPr sz="2200" b="0">
-                <a:solidFill>
-                  <a:srgbClr val="222222"/>
-                </a:solidFill>
-                <a:latin typeface="Calibri"/>
-              </a:rPr>
-              <a:t>Development/implementation: write the code in modules.</a:t>
+              <a:rPr sz="2000" b="0">
+                <a:solidFill>
+                  <a:srgbClr val="222222"/>
+                </a:solidFill>
+                <a:latin typeface="Calibri"/>
+              </a:rPr>
+              <a:t>Merits: flexible, early usable software, close client involvement.</a:t>
             </a:r>
           </a:p>
           <a:p>
             <a:pPr/>
             <a:r>
-              <a:rPr sz="2200" b="0">
-                <a:solidFill>
-                  <a:srgbClr val="222222"/>
-                </a:solidFill>
-                <a:latin typeface="Calibri"/>
-              </a:rPr>
-              <a:t>Testing then evaluation: test against requirements with normal, boundary and erroneous data (alpha/beta), then evaluate against the original requirements.</a:t>
+              <a:rPr sz="2000" b="0">
+                <a:solidFill>
+                  <a:srgbClr val="222222"/>
+                </a:solidFill>
+                <a:latin typeface="Calibri"/>
+              </a:rPr>
+              <a:t>Drawbacks: lighter documentation; final cost and timescale are hard to predict at the start.</a:t>
+            </a:r>
+          </a:p>
+          <a:p>
+            <a:pPr/>
+            <a:r>
+              <a:rPr sz="2000" b="0">
+                <a:solidFill>
+                  <a:srgbClr val="222222"/>
+                </a:solidFill>
+                <a:latin typeface="Calibri"/>
+              </a:rPr>
+              <a:t>Best when requirements are unclear or expected to change.</a:t>
             </a:r>
           </a:p>
         </p:txBody>
@@ -4911,7 +7627,7 @@
                 </a:solidFill>
                 <a:latin typeface="Calibri"/>
               </a:rPr>
-              <a:t>Testing and choosing a methodology</a:t>
+              <a:t>Extreme programming (XP)</a:t>
             </a:r>
           </a:p>
         </p:txBody>
@@ -4940,49 +7656,61 @@
           <a:p>
             <a:pPr/>
             <a:r>
-              <a:rPr sz="2200" b="0">
-                <a:solidFill>
-                  <a:srgbClr val="222222"/>
-                </a:solidFill>
-                <a:latin typeface="Calibri"/>
-              </a:rPr>
-              <a:t>Normal/valid data are typical in-range values that should be accepted.</a:t>
+              <a:rPr sz="2000" b="0">
+                <a:solidFill>
+                  <a:srgbClr val="222222"/>
+                </a:solidFill>
+                <a:latin typeface="Calibri"/>
+              </a:rPr>
+              <a:t>An Agile methodology pushed to extremes for code quality.</a:t>
             </a:r>
           </a:p>
           <a:p>
             <a:pPr/>
             <a:r>
-              <a:rPr sz="2200" b="0">
-                <a:solidFill>
-                  <a:srgbClr val="222222"/>
-                </a:solidFill>
-                <a:latin typeface="Calibri"/>
-              </a:rPr>
-              <a:t>Boundary data are values at the edges of the acceptable range.</a:t>
+              <a:rPr sz="2000" b="0">
+                <a:solidFill>
+                  <a:srgbClr val="222222"/>
+                </a:solidFill>
+                <a:latin typeface="Calibri"/>
+              </a:rPr>
+              <a:t>Pair programming: two developers share one machine, one typing while the other reviews.</a:t>
             </a:r>
           </a:p>
           <a:p>
             <a:pPr/>
             <a:r>
-              <a:rPr sz="2200" b="0">
-                <a:solidFill>
-                  <a:srgbClr val="222222"/>
-                </a:solidFill>
-                <a:latin typeface="Calibri"/>
-              </a:rPr>
-              <a:t>Erroneous/invalid data are out-of-range values that should be rejected.</a:t>
+              <a:rPr sz="2000" b="0">
+                <a:solidFill>
+                  <a:srgbClr val="222222"/>
+                </a:solidFill>
+                <a:latin typeface="Calibri"/>
+              </a:rPr>
+              <a:t>Tests are written before code (test-driven development) and run constantly.</a:t>
             </a:r>
           </a:p>
           <a:p>
             <a:pPr/>
             <a:r>
-              <a:rPr sz="2200" b="0">
-                <a:solidFill>
-                  <a:srgbClr val="222222"/>
-                </a:solidFill>
-                <a:latin typeface="Calibri"/>
-              </a:rPr>
-              <a:t>Methodology questions are AO2/AO3: justify against scenario clues such as budget, deadline, clarity of requirements and risk rather than just describing.</a:t>
+              <a:rPr sz="2000" b="0">
+                <a:solidFill>
+                  <a:srgbClr val="222222"/>
+                </a:solidFill>
+                <a:latin typeface="Calibri"/>
+              </a:rPr>
+              <a:t>A customer representative sits within the team to answer questions immediately.</a:t>
+            </a:r>
+          </a:p>
+          <a:p>
+            <a:pPr/>
+            <a:r>
+              <a:rPr sz="2000" b="0">
+                <a:solidFill>
+                  <a:srgbClr val="222222"/>
+                </a:solidFill>
+                <a:latin typeface="Calibri"/>
+              </a:rPr>
+              <a:t>Merit: very high quality code; drawback: staff-intensive and demands a committed on-site customer.</a:t>
             </a:r>
           </a:p>
         </p:txBody>
